--- a/docs/BrightSmile_Dental_AI_Presentation.pptx
+++ b/docs/BrightSmile_Dental_AI_Presentation.pptx
@@ -1828,7 +1828,7 @@
                 <a:ea typeface="Arial" pitchFamily="34" charset="-122"/>
                 <a:cs typeface="Arial" pitchFamily="34" charset="-120"/>
               </a:rPr>
-              <a:t>Real-Time WebRTC Voice</a:t>
+              <a:t>Realtime Streaming Voice</a:t>
             </a:r>
             <a:endParaRPr lang="en-US" sz="1150" dirty="0"/>
           </a:p>
@@ -1867,7 +1867,7 @@
                 <a:ea typeface="Arial" pitchFamily="34" charset="-122"/>
                 <a:cs typeface="Arial" pitchFamily="34" charset="-120"/>
               </a:rPr>
-              <a:t>Natural human-like voice with &lt;300ms latency &amp; zero master key leaks</a:t>
+              <a:t>Natural human-like voice over WebSocket, provider-agnostic &amp; zero master key leaks</a:t>
             </a:r>
             <a:endParaRPr lang="en-US" sz="850" dirty="0"/>
           </a:p>
@@ -2888,7 +2888,7 @@
                 <a:ea typeface="Arial" pitchFamily="34" charset="-122"/>
                 <a:cs typeface="Arial" pitchFamily="34" charset="-120"/>
               </a:rPr>
-              <a:t>Patients book anytime via spoken voice calls (WebRTC) or instant chat.</a:t>
+              <a:t>Patients book anytime via spoken voice calls (streaming WebSocket) or instant chat.</a:t>
             </a:r>
             <a:endParaRPr lang="en-US" sz="950" dirty="0"/>
           </a:p>
@@ -4013,7 +4013,7 @@
                 <a:ea typeface="Arial" pitchFamily="34" charset="-122"/>
                 <a:cs typeface="Arial" pitchFamily="34" charset="-120"/>
               </a:rPr>
-              <a:t>Patient speaks via WebRTC audio (Opus) or sends message via Next.js chat portal.</a:t>
+              <a:t>Patient speaks via streaming PCM audio over WebSocket, or sends a message via the Next.js chat portal.</a:t>
             </a:r>
             <a:endParaRPr lang="en-US" sz="800" dirty="0"/>
           </a:p>
@@ -4611,7 +4611,7 @@
                 <a:ea typeface="Arial" pitchFamily="34" charset="-122"/>
                 <a:cs typeface="Arial" pitchFamily="34" charset="-120"/>
               </a:rPr>
-              <a:t>Issues &lt;60s ephemeral secrets. Routes tool executions via WebRTC DataChannel.</a:t>
+              <a:t>Selects the configured voice provider and returns its session descriptor. Tool calls are executed server-side.</a:t>
             </a:r>
             <a:endParaRPr lang="en-US" sz="800" dirty="0"/>
           </a:p>
@@ -5314,7 +5314,7 @@
                 <a:ea typeface="Arial" pitchFamily="34" charset="-122"/>
                 <a:cs typeface="Arial" pitchFamily="34" charset="-120"/>
               </a:rPr>
-              <a:t>1. Ephemeral Secret Isolation
+              <a:t>1. Server-Owned Voice Session
 </a:t>
             </a:r>
             <a:pPr indent="0" marL="0">
@@ -5329,7 +5329,7 @@
                 <a:ea typeface="Arial" pitchFamily="34" charset="-122"/>
                 <a:cs typeface="Arial" pitchFamily="34" charset="-120"/>
               </a:rPr>
-              <a:t>Master OpenAI keys never touch the browser. Short-lived tokens expire in &lt;60 seconds.</a:t>
+              <a:t>Master provider keys never touch the browser. The server returns only a session descriptor with the role and tools it granted.</a:t>
             </a:r>
             <a:endParaRPr lang="en-US" sz="900" dirty="0"/>
           </a:p>
@@ -8262,7 +8262,7 @@
                 <a:ea typeface="Arial" pitchFamily="34" charset="-122"/>
                 <a:cs typeface="Arial" pitchFamily="34" charset="-120"/>
               </a:rPr>
-              <a:t>CONVERSATIONAL VOICE AI &amp; WEBRTC FLOW</a:t>
+              <a:t>CONVERSATIONAL VOICE AI &amp; WEBSOCKET FLOW</a:t>
             </a:r>
             <a:endParaRPr lang="en-US" sz="1000" dirty="0"/>
           </a:p>
@@ -8301,7 +8301,7 @@
                 <a:ea typeface="Arial" pitchFamily="34" charset="-122"/>
                 <a:cs typeface="Arial" pitchFamily="34" charset="-120"/>
               </a:rPr>
-              <a:t>Low-Latency WebRTC Voice Architecture (&lt;300ms)</a:t>
+              <a:t>Provider-Agnostic Streaming Voice Architecture</a:t>
             </a:r>
             <a:endParaRPr lang="en-US" sz="2000" dirty="0"/>
           </a:p>
@@ -8340,7 +8340,7 @@
                 <a:ea typeface="Arial" pitchFamily="34" charset="-122"/>
                 <a:cs typeface="Arial" pitchFamily="34" charset="-120"/>
               </a:rPr>
-              <a:t>How patient voice streams directly to the AI engine while clinical tool calls are verified safely on the backend.</a:t>
+              <a:t>How patient voice streams over WebSocket to the configured realtime provider while clinical tool calls are verified safely on the backend.</a:t>
             </a:r>
             <a:endParaRPr lang="en-US" sz="1100" dirty="0"/>
           </a:p>
@@ -8472,7 +8472,7 @@
                 <a:ea typeface="Arial" pitchFamily="34" charset="-122"/>
                 <a:cs typeface="Arial" pitchFamily="34" charset="-120"/>
               </a:rPr>
-              <a:t>POST /api/v1/voice/session</a:t>
+              <a:t>GET /api/v1/voice/session</a:t>
             </a:r>
             <a:endParaRPr lang="en-US" sz="800" dirty="0"/>
           </a:p>
@@ -8511,7 +8511,7 @@
                 <a:ea typeface="Arial" pitchFamily="34" charset="-122"/>
                 <a:cs typeface="Arial" pitchFamily="34" charset="-120"/>
               </a:rPr>
-              <a:t>Ephemeral Token Gate</a:t>
+              <a:t>Provider Session Gate</a:t>
             </a:r>
             <a:endParaRPr lang="en-US" sz="1300" dirty="0"/>
           </a:p>
@@ -8573,7 +8573,7 @@
                 <a:ea typeface="Arial" pitchFamily="34" charset="-122"/>
                 <a:cs typeface="Arial" pitchFamily="34" charset="-120"/>
               </a:rPr>
-              <a:t>Client browser requests a temporary session token. Next.js server calls OpenAI to generate an ephemeral client secret with &lt;60s expiry.</a:t>
+              <a:t>Server picks the configured voice provider and returns its session descriptor: a single-use Gemini token, or a direct endpoint URL when an OpenAI-compatible server is configured.</a:t>
             </a:r>
             <a:endParaRPr lang="en-US" sz="850" dirty="0"/>
           </a:p>
@@ -8837,7 +8837,7 @@
                 <a:ea typeface="Arial" pitchFamily="34" charset="-122"/>
                 <a:cs typeface="Arial" pitchFamily="34" charset="-120"/>
               </a:rPr>
-              <a:t>PeerConnection (Opus Audio)</a:t>
+              <a:t>WebSocket (PCM16 16/24 kHz)</a:t>
             </a:r>
             <a:endParaRPr lang="en-US" sz="800" dirty="0"/>
           </a:p>
@@ -8876,7 +8876,7 @@
                 <a:ea typeface="Arial" pitchFamily="34" charset="-122"/>
                 <a:cs typeface="Arial" pitchFamily="34" charset="-120"/>
               </a:rPr>
-              <a:t>Direct WebRTC Audio</a:t>
+              <a:t>Streaming WebSocket Audio</a:t>
             </a:r>
             <a:endParaRPr lang="en-US" sz="1300" dirty="0"/>
           </a:p>
@@ -8938,7 +8938,7 @@
                 <a:ea typeface="Arial" pitchFamily="34" charset="-122"/>
                 <a:cs typeface="Arial" pitchFamily="34" charset="-120"/>
               </a:rPr>
-              <a:t>Browser establishes direct full-duplex WebRTC audio connection to OpenAI Realtime. Provides human-like speech with immediate interruption capability.</a:t>
+              <a:t>Browser streams base64 PCM audio over a WebSocket to the realtime provider in both directions. Full-duplex audio with immediate interruption handling.</a:t>
             </a:r>
             <a:endParaRPr lang="en-US" sz="850" dirty="0"/>
           </a:p>
@@ -9004,7 +9004,7 @@
                 <a:ea typeface="Arial" pitchFamily="34" charset="-122"/>
                 <a:cs typeface="Arial" pitchFamily="34" charset="-120"/>
               </a:rPr>
-              <a:t>&lt;300ms LATENCY</a:t>
+              <a:t>PROVIDER-AGNOSTIC</a:t>
             </a:r>
             <a:endParaRPr lang="en-US" sz="750" dirty="0"/>
           </a:p>
@@ -9303,7 +9303,7 @@
                 <a:ea typeface="Arial" pitchFamily="34" charset="-122"/>
                 <a:cs typeface="Arial" pitchFamily="34" charset="-120"/>
               </a:rPr>
-              <a:t>When patient confirms a slot, function calling triggers over WebRTC DataChannel. The backend validates doctor qualification and writes to the DB.</a:t>
+              <a:t>When the patient confirms a slot, the provider emits a tool call that the browser relays to the server. The backend validates doctor qualification and writes to the DB.</a:t>
             </a:r>
             <a:endParaRPr lang="en-US" sz="850" dirty="0"/>
           </a:p>
@@ -9536,7 +9536,7 @@
                 <a:ea typeface="Arial" pitchFamily="34" charset="-122"/>
                 <a:cs typeface="Arial" pitchFamily="34" charset="-120"/>
               </a:rPr>
-              <a:t>BRIGHTSMILE WEBRTC ENGINE (&lt;300ms Delay)</a:t>
+              <a:t>BRIGHTSMILE STREAMING ENGINE</a:t>
             </a:r>
             <a:endParaRPr lang="en-US" sz="900" dirty="0"/>
           </a:p>
@@ -11298,7 +11298,7 @@
                           <a:ea typeface="Arial" pitchFamily="34" charset="-122"/>
                           <a:cs typeface="Arial" pitchFamily="34" charset="-120"/>
                         </a:rPr>
-                        <a:t>Voice AI (OpenAI Realtime)</a:t>
+                        <a:t>Voice AI (Realtime, illustrative)</a:t>
                       </a:r>
                       <a:endParaRPr lang="en-US" sz="850" dirty="0">
                         <a:latin typeface="Arial" charset="0"/>

--- a/docs/BrightSmile_Dental_AI_Presentation.pptx
+++ b/docs/BrightSmile_Dental_AI_Presentation.pptx
@@ -10894,7 +10894,7 @@
                 <a:ea typeface="Arial" pitchFamily="34" charset="-122"/>
                 <a:cs typeface="Arial" pitchFamily="34" charset="-120"/>
               </a:rPr>
-              <a:t>FINANCIAL FORECAST &amp; OPERATING ECONOMICS</a:t>
+              <a:t>OPERATING ECONOMICS</a:t>
             </a:r>
             <a:endParaRPr lang="en-US" sz="1000" dirty="0"/>
           </a:p>
@@ -10933,7 +10933,7 @@
                 <a:ea typeface="Arial" pitchFamily="34" charset="-122"/>
                 <a:cs typeface="Arial" pitchFamily="34" charset="-120"/>
               </a:rPr>
-              <a:t>Transparent $599.05/mo Operating Cost &amp; 83% ROI</a:t>
+              <a:t>What Sets the Monthly Bill (and What Doesn't)</a:t>
             </a:r>
             <a:endParaRPr lang="en-US" sz="2000" dirty="0"/>
           </a:p>
@@ -10972,7 +10972,7 @@
                 <a:ea typeface="Arial" pitchFamily="34" charset="-122"/>
                 <a:cs typeface="Arial" pitchFamily="34" charset="-120"/>
               </a:rPr>
-              <a:t>Modeled on a busy dental practice handling 1,000 voice calls, 3,000 chat sessions, and ~650 bookings/month.</a:t>
+              <a:t>Voice is the only line large enough to dominate a clinic budget, and it is the one you choose.</a:t>
             </a:r>
             <a:endParaRPr lang="en-US" sz="1100" dirty="0"/>
           </a:p>
@@ -10994,25 +10994,23 @@
         </p:nvGraphicFramePr>
         <p:xfrm>
           <a:off x="731520" y="1417320"/>
-          <a:ext cx="4297680" cy="2377440"/>
+          <a:ext cx="4572000" cy="2651760"/>
         </p:xfrm>
         <a:graphic>
           <a:graphicData uri="http://schemas.openxmlformats.org/drawingml/2006/table">
             <a:tbl>
               <a:tblPr/>
               <a:tblGrid>
-                <a:gridCol w="1828800"/>
-                <a:gridCol w="1188720"/>
-                <a:gridCol w="640080"/>
-                <a:gridCol w="640080"/>
+                <a:gridCol w="1280160"/>
+                <a:gridCol w="3291840"/>
               </a:tblGrid>
-              <a:tr h="339634">
+              <a:tr h="441960">
                 <a:tc>
                   <a:txBody>
                     <a:bodyPr/>
                     <a:lstStyle/>
                     <a:p>
-                      <a:pPr algn="ctr" indent="0" marL="0">
+                      <a:pPr indent="0" marL="0">
                         <a:buNone/>
                       </a:pPr>
                       <a:r>
@@ -11024,7 +11022,7 @@
                           <a:ea typeface="Arial" pitchFamily="34" charset="-122"/>
                           <a:cs typeface="Arial" pitchFamily="34" charset="-120"/>
                         </a:rPr>
-                        <a:t>Infrastructure Tier</a:t>
+                        <a:t>Component</a:t>
                       </a:r>
                       <a:endParaRPr lang="en-US" sz="850" dirty="0">
                         <a:latin typeface="Arial" charset="0"/>
@@ -11080,7 +11078,7 @@
                     <a:bodyPr/>
                     <a:lstStyle/>
                     <a:p>
-                      <a:pPr algn="ctr" indent="0" marL="0">
+                      <a:pPr indent="0" marL="0">
                         <a:buNone/>
                       </a:pPr>
                       <a:r>
@@ -11092,7 +11090,7 @@
                           <a:ea typeface="Arial" pitchFamily="34" charset="-122"/>
                           <a:cs typeface="Arial" pitchFamily="34" charset="-120"/>
                         </a:rPr>
-                        <a:t>Monthly Workload</a:t>
+                        <a:t>Cost Driver</a:t>
                       </a:r>
                       <a:endParaRPr lang="en-US" sz="850" dirty="0">
                         <a:latin typeface="Arial" charset="0"/>
@@ -11143,24 +11141,26 @@
                     </a:solidFill>
                   </a:tcPr>
                 </a:tc>
+              </a:tr>
+              <a:tr h="441960">
                 <a:tc>
                   <a:txBody>
                     <a:bodyPr/>
                     <a:lstStyle/>
                     <a:p>
-                      <a:pPr algn="ctr" indent="0" marL="0">
+                      <a:pPr indent="0" marL="0">
                         <a:buNone/>
                       </a:pPr>
                       <a:r>
                         <a:rPr lang="en-US" sz="850" b="1" dirty="0">
                           <a:solidFill>
-                            <a:srgbClr val="FFFFFF"/>
+                            <a:srgbClr val="0284C7"/>
                           </a:solidFill>
                           <a:latin typeface="Arial" pitchFamily="34" charset="0"/>
                           <a:ea typeface="Arial" pitchFamily="34" charset="-122"/>
                           <a:cs typeface="Arial" pitchFamily="34" charset="-120"/>
                         </a:rPr>
-                        <a:t>Cost</a:t>
+                        <a:t>Realtime Voice</a:t>
                       </a:r>
                       <a:endParaRPr lang="en-US" sz="850" dirty="0">
                         <a:latin typeface="Arial" charset="0"/>
@@ -11206,9 +11206,6 @@
                       <a:headEnd type="none" w="med" len="med"/>
                       <a:tailEnd type="none" w="med" len="med"/>
                     </a:lnB>
-                    <a:solidFill>
-                      <a:srgbClr val="0F172A"/>
-                    </a:solidFill>
                   </a:tcPr>
                 </a:tc>
                 <a:tc>
@@ -11216,19 +11213,19 @@
                     <a:bodyPr/>
                     <a:lstStyle/>
                     <a:p>
-                      <a:pPr algn="ctr" indent="0" marL="0">
+                      <a:pPr indent="0" marL="0">
                         <a:buNone/>
                       </a:pPr>
                       <a:r>
-                        <a:rPr lang="en-US" sz="850" b="1" dirty="0">
+                        <a:rPr lang="en-US" sz="850" dirty="0">
                           <a:solidFill>
-                            <a:srgbClr val="FFFFFF"/>
+                            <a:srgbClr val="334155"/>
                           </a:solidFill>
                           <a:latin typeface="Arial" pitchFamily="34" charset="0"/>
                           <a:ea typeface="Arial" pitchFamily="34" charset="-122"/>
                           <a:cs typeface="Arial" pitchFamily="34" charset="-120"/>
                         </a:rPr>
-                        <a:t>% Total</a:t>
+                        <a:t>Per audio-minute in and out on a hosted provider. Becomes GPU time and electricity on a local model.</a:t>
                       </a:r>
                       <a:endParaRPr lang="en-US" sz="850" dirty="0">
                         <a:latin typeface="Arial" charset="0"/>
@@ -11274,19 +11271,16 @@
                       <a:headEnd type="none" w="med" len="med"/>
                       <a:tailEnd type="none" w="med" len="med"/>
                     </a:lnB>
-                    <a:solidFill>
-                      <a:srgbClr val="0F172A"/>
-                    </a:solidFill>
                   </a:tcPr>
                 </a:tc>
               </a:tr>
-              <a:tr h="339634">
+              <a:tr h="441960">
                 <a:tc>
                   <a:txBody>
                     <a:bodyPr/>
                     <a:lstStyle/>
                     <a:p>
-                      <a:pPr algn="ctr" indent="0" marL="0">
+                      <a:pPr indent="0" marL="0">
                         <a:buNone/>
                       </a:pPr>
                       <a:r>
@@ -11298,7 +11292,7 @@
                           <a:ea typeface="Arial" pitchFamily="34" charset="-122"/>
                           <a:cs typeface="Arial" pitchFamily="34" charset="-120"/>
                         </a:rPr>
-                        <a:t>Voice AI (Realtime, illustrative)</a:t>
+                        <a:t>Text Chat LLM</a:t>
                       </a:r>
                       <a:endParaRPr lang="en-US" sz="850" dirty="0">
                         <a:latin typeface="Arial" charset="0"/>
@@ -11351,7 +11345,7 @@
                     <a:bodyPr/>
                     <a:lstStyle/>
                     <a:p>
-                      <a:pPr algn="ctr" indent="0" marL="0">
+                      <a:pPr indent="0" marL="0">
                         <a:buNone/>
                       </a:pPr>
                       <a:r>
@@ -11363,7 +11357,7 @@
                           <a:ea typeface="Arial" pitchFamily="34" charset="-122"/>
                           <a:cs typeface="Arial" pitchFamily="34" charset="-120"/>
                         </a:rPr>
-                        <a:t>3,000 Spoken Min</a:t>
+                        <a:t>Per input/output token on the configured model. Scales with conversation length, not bookings.</a:t>
                       </a:r>
                       <a:endParaRPr lang="en-US" sz="850" dirty="0">
                         <a:latin typeface="Arial" charset="0"/>
@@ -11411,24 +11405,26 @@
                     </a:lnB>
                   </a:tcPr>
                 </a:tc>
+              </a:tr>
+              <a:tr h="441960">
                 <a:tc>
                   <a:txBody>
                     <a:bodyPr/>
                     <a:lstStyle/>
                     <a:p>
-                      <a:pPr algn="ctr" indent="0" marL="0">
+                      <a:pPr indent="0" marL="0">
                         <a:buNone/>
                       </a:pPr>
                       <a:r>
                         <a:rPr lang="en-US" sz="850" b="1" dirty="0">
                           <a:solidFill>
-                            <a:srgbClr val="0284C7"/>
+                            <a:srgbClr val="0F172A"/>
                           </a:solidFill>
                           <a:latin typeface="Arial" pitchFamily="34" charset="0"/>
                           <a:ea typeface="Arial" pitchFamily="34" charset="-122"/>
                           <a:cs typeface="Arial" pitchFamily="34" charset="-120"/>
                         </a:rPr>
-                        <a:t>$555.00</a:t>
+                        <a:t>App Hosting</a:t>
                       </a:r>
                       <a:endParaRPr lang="en-US" sz="850" dirty="0">
                         <a:latin typeface="Arial" charset="0"/>
@@ -11481,7 +11477,7 @@
                     <a:bodyPr/>
                     <a:lstStyle/>
                     <a:p>
-                      <a:pPr algn="ctr" indent="0" marL="0">
+                      <a:pPr indent="0" marL="0">
                         <a:buNone/>
                       </a:pPr>
                       <a:r>
@@ -11493,7 +11489,7 @@
                           <a:ea typeface="Arial" pitchFamily="34" charset="-122"/>
                           <a:cs typeface="Arial" pitchFamily="34" charset="-120"/>
                         </a:rPr>
-                        <a:t>92.6%</a:t>
+                        <a:t>Serverless plan or container, sized to request volume.</a:t>
                       </a:r>
                       <a:endParaRPr lang="en-US" sz="850" dirty="0">
                         <a:latin typeface="Arial" charset="0"/>
@@ -11542,13 +11538,13 @@
                   </a:tcPr>
                 </a:tc>
               </a:tr>
-              <a:tr h="339634">
+              <a:tr h="441960">
                 <a:tc>
                   <a:txBody>
                     <a:bodyPr/>
                     <a:lstStyle/>
                     <a:p>
-                      <a:pPr algn="ctr" indent="0" marL="0">
+                      <a:pPr indent="0" marL="0">
                         <a:buNone/>
                       </a:pPr>
                       <a:r>
@@ -11560,7 +11556,7 @@
                           <a:ea typeface="Arial" pitchFamily="34" charset="-122"/>
                           <a:cs typeface="Arial" pitchFamily="34" charset="-120"/>
                         </a:rPr>
-                        <a:t>Chat AI (GPT-4o-mini)</a:t>
+                        <a:t>PostgreSQL</a:t>
                       </a:r>
                       <a:endParaRPr lang="en-US" sz="850" dirty="0">
                         <a:latin typeface="Arial" charset="0"/>
@@ -11613,7 +11609,7 @@
                     <a:bodyPr/>
                     <a:lstStyle/>
                     <a:p>
-                      <a:pPr algn="ctr" indent="0" marL="0">
+                      <a:pPr indent="0" marL="0">
                         <a:buNone/>
                       </a:pPr>
                       <a:r>
@@ -11625,7 +11621,7 @@
                           <a:ea typeface="Arial" pitchFamily="34" charset="-122"/>
                           <a:cs typeface="Arial" pitchFamily="34" charset="-120"/>
                         </a:rPr>
-                        <a:t>15,000 Turns</a:t>
+                        <a:t>Managed instance with automated backups and pooling.</a:t>
                       </a:r>
                       <a:endParaRPr lang="en-US" sz="850" dirty="0">
                         <a:latin typeface="Arial" charset="0"/>
@@ -11673,24 +11669,26 @@
                     </a:lnB>
                   </a:tcPr>
                 </a:tc>
+              </a:tr>
+              <a:tr h="441960">
                 <a:tc>
                   <a:txBody>
                     <a:bodyPr/>
                     <a:lstStyle/>
                     <a:p>
-                      <a:pPr algn="ctr" indent="0" marL="0">
+                      <a:pPr indent="0" marL="0">
                         <a:buNone/>
                       </a:pPr>
                       <a:r>
                         <a:rPr lang="en-US" sz="850" b="1" dirty="0">
                           <a:solidFill>
-                            <a:srgbClr val="0284C7"/>
+                            <a:srgbClr val="0F172A"/>
                           </a:solidFill>
                           <a:latin typeface="Arial" pitchFamily="34" charset="0"/>
                           <a:ea typeface="Arial" pitchFamily="34" charset="-122"/>
                           <a:cs typeface="Arial" pitchFamily="34" charset="-120"/>
                         </a:rPr>
-                        <a:t>$4.05</a:t>
+                        <a:t>Calendar APIs</a:t>
                       </a:r>
                       <a:endParaRPr lang="en-US" sz="850" dirty="0">
                         <a:latin typeface="Arial" charset="0"/>
@@ -11743,7 +11741,7 @@
                     <a:bodyPr/>
                     <a:lstStyle/>
                     <a:p>
-                      <a:pPr algn="ctr" indent="0" marL="0">
+                      <a:pPr indent="0" marL="0">
                         <a:buNone/>
                       </a:pPr>
                       <a:r>
@@ -11755,7 +11753,7 @@
                           <a:ea typeface="Arial" pitchFamily="34" charset="-122"/>
                           <a:cs typeface="Arial" pitchFamily="34" charset="-120"/>
                         </a:rPr>
-                        <a:t>0.7%</a:t>
+                        <a:t>Google Calendar and Microsoft Graph free quotas cover a single clinic.</a:t>
                       </a:r>
                       <a:endParaRPr lang="en-US" sz="850" dirty="0">
                         <a:latin typeface="Arial" charset="0"/>
@@ -11804,1066 +11802,6 @@
                   </a:tcPr>
                 </a:tc>
               </a:tr>
-              <a:tr h="339634">
-                <a:tc>
-                  <a:txBody>
-                    <a:bodyPr/>
-                    <a:lstStyle/>
-                    <a:p>
-                      <a:pPr algn="ctr" indent="0" marL="0">
-                        <a:buNone/>
-                      </a:pPr>
-                      <a:r>
-                        <a:rPr lang="en-US" sz="850" b="1" dirty="0">
-                          <a:solidFill>
-                            <a:srgbClr val="0F172A"/>
-                          </a:solidFill>
-                          <a:latin typeface="Arial" pitchFamily="34" charset="0"/>
-                          <a:ea typeface="Arial" pitchFamily="34" charset="-122"/>
-                          <a:cs typeface="Arial" pitchFamily="34" charset="-120"/>
-                        </a:rPr>
-                        <a:t>App Hosting (Next.js)</a:t>
-                      </a:r>
-                      <a:endParaRPr lang="en-US" sz="850" dirty="0">
-                        <a:latin typeface="Arial" charset="0"/>
-                        <a:ea typeface="Arial" charset="0"/>
-                        <a:cs typeface="Arial" charset="0"/>
-                      </a:endParaRPr>
-                    </a:p>
-                  </a:txBody>
-                  <a:tcPr marL="91440" marR="91440" marT="45720" marB="45720" anchor="ctr">
-                    <a:lnL w="6350" cap="flat" cmpd="sng" algn="ctr">
-                      <a:solidFill>
-                        <a:srgbClr val="CBD5E1"/>
-                      </a:solidFill>
-                      <a:prstDash val="solid"/>
-                      <a:round/>
-                      <a:headEnd type="none" w="med" len="med"/>
-                      <a:tailEnd type="none" w="med" len="med"/>
-                    </a:lnL>
-                    <a:lnR w="6350" cap="flat" cmpd="sng" algn="ctr">
-                      <a:solidFill>
-                        <a:srgbClr val="CBD5E1"/>
-                      </a:solidFill>
-                      <a:prstDash val="solid"/>
-                      <a:round/>
-                      <a:headEnd type="none" w="med" len="med"/>
-                      <a:tailEnd type="none" w="med" len="med"/>
-                    </a:lnR>
-                    <a:lnT w="6350" cap="flat" cmpd="sng" algn="ctr">
-                      <a:solidFill>
-                        <a:srgbClr val="CBD5E1"/>
-                      </a:solidFill>
-                      <a:prstDash val="solid"/>
-                      <a:round/>
-                      <a:headEnd type="none" w="med" len="med"/>
-                      <a:tailEnd type="none" w="med" len="med"/>
-                    </a:lnT>
-                    <a:lnB w="6350" cap="flat" cmpd="sng" algn="ctr">
-                      <a:solidFill>
-                        <a:srgbClr val="CBD5E1"/>
-                      </a:solidFill>
-                      <a:prstDash val="solid"/>
-                      <a:round/>
-                      <a:headEnd type="none" w="med" len="med"/>
-                      <a:tailEnd type="none" w="med" len="med"/>
-                    </a:lnB>
-                  </a:tcPr>
-                </a:tc>
-                <a:tc>
-                  <a:txBody>
-                    <a:bodyPr/>
-                    <a:lstStyle/>
-                    <a:p>
-                      <a:pPr algn="ctr" indent="0" marL="0">
-                        <a:buNone/>
-                      </a:pPr>
-                      <a:r>
-                        <a:rPr lang="en-US" sz="850" dirty="0">
-                          <a:solidFill>
-                            <a:srgbClr val="334155"/>
-                          </a:solidFill>
-                          <a:latin typeface="Arial" pitchFamily="34" charset="0"/>
-                          <a:ea typeface="Arial" pitchFamily="34" charset="-122"/>
-                          <a:cs typeface="Arial" pitchFamily="34" charset="-120"/>
-                        </a:rPr>
-                        <a:t>150,000 Req/Mo</a:t>
-                      </a:r>
-                      <a:endParaRPr lang="en-US" sz="850" dirty="0">
-                        <a:latin typeface="Arial" charset="0"/>
-                        <a:ea typeface="Arial" charset="0"/>
-                        <a:cs typeface="Arial" charset="0"/>
-                      </a:endParaRPr>
-                    </a:p>
-                  </a:txBody>
-                  <a:tcPr marL="91440" marR="91440" marT="45720" marB="45720" anchor="ctr">
-                    <a:lnL w="6350" cap="flat" cmpd="sng" algn="ctr">
-                      <a:solidFill>
-                        <a:srgbClr val="CBD5E1"/>
-                      </a:solidFill>
-                      <a:prstDash val="solid"/>
-                      <a:round/>
-                      <a:headEnd type="none" w="med" len="med"/>
-                      <a:tailEnd type="none" w="med" len="med"/>
-                    </a:lnL>
-                    <a:lnR w="6350" cap="flat" cmpd="sng" algn="ctr">
-                      <a:solidFill>
-                        <a:srgbClr val="CBD5E1"/>
-                      </a:solidFill>
-                      <a:prstDash val="solid"/>
-                      <a:round/>
-                      <a:headEnd type="none" w="med" len="med"/>
-                      <a:tailEnd type="none" w="med" len="med"/>
-                    </a:lnR>
-                    <a:lnT w="6350" cap="flat" cmpd="sng" algn="ctr">
-                      <a:solidFill>
-                        <a:srgbClr val="CBD5E1"/>
-                      </a:solidFill>
-                      <a:prstDash val="solid"/>
-                      <a:round/>
-                      <a:headEnd type="none" w="med" len="med"/>
-                      <a:tailEnd type="none" w="med" len="med"/>
-                    </a:lnT>
-                    <a:lnB w="6350" cap="flat" cmpd="sng" algn="ctr">
-                      <a:solidFill>
-                        <a:srgbClr val="CBD5E1"/>
-                      </a:solidFill>
-                      <a:prstDash val="solid"/>
-                      <a:round/>
-                      <a:headEnd type="none" w="med" len="med"/>
-                      <a:tailEnd type="none" w="med" len="med"/>
-                    </a:lnB>
-                  </a:tcPr>
-                </a:tc>
-                <a:tc>
-                  <a:txBody>
-                    <a:bodyPr/>
-                    <a:lstStyle/>
-                    <a:p>
-                      <a:pPr algn="ctr" indent="0" marL="0">
-                        <a:buNone/>
-                      </a:pPr>
-                      <a:r>
-                        <a:rPr lang="en-US" sz="850" b="1" dirty="0">
-                          <a:solidFill>
-                            <a:srgbClr val="0284C7"/>
-                          </a:solidFill>
-                          <a:latin typeface="Arial" pitchFamily="34" charset="0"/>
-                          <a:ea typeface="Arial" pitchFamily="34" charset="-122"/>
-                          <a:cs typeface="Arial" pitchFamily="34" charset="-120"/>
-                        </a:rPr>
-                        <a:t>$20.00</a:t>
-                      </a:r>
-                      <a:endParaRPr lang="en-US" sz="850" dirty="0">
-                        <a:latin typeface="Arial" charset="0"/>
-                        <a:ea typeface="Arial" charset="0"/>
-                        <a:cs typeface="Arial" charset="0"/>
-                      </a:endParaRPr>
-                    </a:p>
-                  </a:txBody>
-                  <a:tcPr marL="91440" marR="91440" marT="45720" marB="45720" anchor="ctr">
-                    <a:lnL w="6350" cap="flat" cmpd="sng" algn="ctr">
-                      <a:solidFill>
-                        <a:srgbClr val="CBD5E1"/>
-                      </a:solidFill>
-                      <a:prstDash val="solid"/>
-                      <a:round/>
-                      <a:headEnd type="none" w="med" len="med"/>
-                      <a:tailEnd type="none" w="med" len="med"/>
-                    </a:lnL>
-                    <a:lnR w="6350" cap="flat" cmpd="sng" algn="ctr">
-                      <a:solidFill>
-                        <a:srgbClr val="CBD5E1"/>
-                      </a:solidFill>
-                      <a:prstDash val="solid"/>
-                      <a:round/>
-                      <a:headEnd type="none" w="med" len="med"/>
-                      <a:tailEnd type="none" w="med" len="med"/>
-                    </a:lnR>
-                    <a:lnT w="6350" cap="flat" cmpd="sng" algn="ctr">
-                      <a:solidFill>
-                        <a:srgbClr val="CBD5E1"/>
-                      </a:solidFill>
-                      <a:prstDash val="solid"/>
-                      <a:round/>
-                      <a:headEnd type="none" w="med" len="med"/>
-                      <a:tailEnd type="none" w="med" len="med"/>
-                    </a:lnT>
-                    <a:lnB w="6350" cap="flat" cmpd="sng" algn="ctr">
-                      <a:solidFill>
-                        <a:srgbClr val="CBD5E1"/>
-                      </a:solidFill>
-                      <a:prstDash val="solid"/>
-                      <a:round/>
-                      <a:headEnd type="none" w="med" len="med"/>
-                      <a:tailEnd type="none" w="med" len="med"/>
-                    </a:lnB>
-                  </a:tcPr>
-                </a:tc>
-                <a:tc>
-                  <a:txBody>
-                    <a:bodyPr/>
-                    <a:lstStyle/>
-                    <a:p>
-                      <a:pPr algn="ctr" indent="0" marL="0">
-                        <a:buNone/>
-                      </a:pPr>
-                      <a:r>
-                        <a:rPr lang="en-US" sz="850" dirty="0">
-                          <a:solidFill>
-                            <a:srgbClr val="334155"/>
-                          </a:solidFill>
-                          <a:latin typeface="Arial" pitchFamily="34" charset="0"/>
-                          <a:ea typeface="Arial" pitchFamily="34" charset="-122"/>
-                          <a:cs typeface="Arial" pitchFamily="34" charset="-120"/>
-                        </a:rPr>
-                        <a:t>3.3%</a:t>
-                      </a:r>
-                      <a:endParaRPr lang="en-US" sz="850" dirty="0">
-                        <a:latin typeface="Arial" charset="0"/>
-                        <a:ea typeface="Arial" charset="0"/>
-                        <a:cs typeface="Arial" charset="0"/>
-                      </a:endParaRPr>
-                    </a:p>
-                  </a:txBody>
-                  <a:tcPr marL="91440" marR="91440" marT="45720" marB="45720" anchor="ctr">
-                    <a:lnL w="6350" cap="flat" cmpd="sng" algn="ctr">
-                      <a:solidFill>
-                        <a:srgbClr val="CBD5E1"/>
-                      </a:solidFill>
-                      <a:prstDash val="solid"/>
-                      <a:round/>
-                      <a:headEnd type="none" w="med" len="med"/>
-                      <a:tailEnd type="none" w="med" len="med"/>
-                    </a:lnL>
-                    <a:lnR w="6350" cap="flat" cmpd="sng" algn="ctr">
-                      <a:solidFill>
-                        <a:srgbClr val="CBD5E1"/>
-                      </a:solidFill>
-                      <a:prstDash val="solid"/>
-                      <a:round/>
-                      <a:headEnd type="none" w="med" len="med"/>
-                      <a:tailEnd type="none" w="med" len="med"/>
-                    </a:lnR>
-                    <a:lnT w="6350" cap="flat" cmpd="sng" algn="ctr">
-                      <a:solidFill>
-                        <a:srgbClr val="CBD5E1"/>
-                      </a:solidFill>
-                      <a:prstDash val="solid"/>
-                      <a:round/>
-                      <a:headEnd type="none" w="med" len="med"/>
-                      <a:tailEnd type="none" w="med" len="med"/>
-                    </a:lnT>
-                    <a:lnB w="6350" cap="flat" cmpd="sng" algn="ctr">
-                      <a:solidFill>
-                        <a:srgbClr val="CBD5E1"/>
-                      </a:solidFill>
-                      <a:prstDash val="solid"/>
-                      <a:round/>
-                      <a:headEnd type="none" w="med" len="med"/>
-                      <a:tailEnd type="none" w="med" len="med"/>
-                    </a:lnB>
-                  </a:tcPr>
-                </a:tc>
-              </a:tr>
-              <a:tr h="339634">
-                <a:tc>
-                  <a:txBody>
-                    <a:bodyPr/>
-                    <a:lstStyle/>
-                    <a:p>
-                      <a:pPr algn="ctr" indent="0" marL="0">
-                        <a:buNone/>
-                      </a:pPr>
-                      <a:r>
-                        <a:rPr lang="en-US" sz="850" b="1" dirty="0">
-                          <a:solidFill>
-                            <a:srgbClr val="0F172A"/>
-                          </a:solidFill>
-                          <a:latin typeface="Arial" pitchFamily="34" charset="0"/>
-                          <a:ea typeface="Arial" pitchFamily="34" charset="-122"/>
-                          <a:cs typeface="Arial" pitchFamily="34" charset="-120"/>
-                        </a:rPr>
-                        <a:t>PostgreSQL Database</a:t>
-                      </a:r>
-                      <a:endParaRPr lang="en-US" sz="850" dirty="0">
-                        <a:latin typeface="Arial" charset="0"/>
-                        <a:ea typeface="Arial" charset="0"/>
-                        <a:cs typeface="Arial" charset="0"/>
-                      </a:endParaRPr>
-                    </a:p>
-                  </a:txBody>
-                  <a:tcPr marL="91440" marR="91440" marT="45720" marB="45720" anchor="ctr">
-                    <a:lnL w="6350" cap="flat" cmpd="sng" algn="ctr">
-                      <a:solidFill>
-                        <a:srgbClr val="CBD5E1"/>
-                      </a:solidFill>
-                      <a:prstDash val="solid"/>
-                      <a:round/>
-                      <a:headEnd type="none" w="med" len="med"/>
-                      <a:tailEnd type="none" w="med" len="med"/>
-                    </a:lnL>
-                    <a:lnR w="6350" cap="flat" cmpd="sng" algn="ctr">
-                      <a:solidFill>
-                        <a:srgbClr val="CBD5E1"/>
-                      </a:solidFill>
-                      <a:prstDash val="solid"/>
-                      <a:round/>
-                      <a:headEnd type="none" w="med" len="med"/>
-                      <a:tailEnd type="none" w="med" len="med"/>
-                    </a:lnR>
-                    <a:lnT w="6350" cap="flat" cmpd="sng" algn="ctr">
-                      <a:solidFill>
-                        <a:srgbClr val="CBD5E1"/>
-                      </a:solidFill>
-                      <a:prstDash val="solid"/>
-                      <a:round/>
-                      <a:headEnd type="none" w="med" len="med"/>
-                      <a:tailEnd type="none" w="med" len="med"/>
-                    </a:lnT>
-                    <a:lnB w="6350" cap="flat" cmpd="sng" algn="ctr">
-                      <a:solidFill>
-                        <a:srgbClr val="CBD5E1"/>
-                      </a:solidFill>
-                      <a:prstDash val="solid"/>
-                      <a:round/>
-                      <a:headEnd type="none" w="med" len="med"/>
-                      <a:tailEnd type="none" w="med" len="med"/>
-                    </a:lnB>
-                  </a:tcPr>
-                </a:tc>
-                <a:tc>
-                  <a:txBody>
-                    <a:bodyPr/>
-                    <a:lstStyle/>
-                    <a:p>
-                      <a:pPr algn="ctr" indent="0" marL="0">
-                        <a:buNone/>
-                      </a:pPr>
-                      <a:r>
-                        <a:rPr lang="en-US" sz="850" dirty="0">
-                          <a:solidFill>
-                            <a:srgbClr val="334155"/>
-                          </a:solidFill>
-                          <a:latin typeface="Arial" pitchFamily="34" charset="0"/>
-                          <a:ea typeface="Arial" pitchFamily="34" charset="-122"/>
-                          <a:cs typeface="Arial" pitchFamily="34" charset="-120"/>
-                        </a:rPr>
-                        <a:t>10GB SSD Storage</a:t>
-                      </a:r>
-                      <a:endParaRPr lang="en-US" sz="850" dirty="0">
-                        <a:latin typeface="Arial" charset="0"/>
-                        <a:ea typeface="Arial" charset="0"/>
-                        <a:cs typeface="Arial" charset="0"/>
-                      </a:endParaRPr>
-                    </a:p>
-                  </a:txBody>
-                  <a:tcPr marL="91440" marR="91440" marT="45720" marB="45720" anchor="ctr">
-                    <a:lnL w="6350" cap="flat" cmpd="sng" algn="ctr">
-                      <a:solidFill>
-                        <a:srgbClr val="CBD5E1"/>
-                      </a:solidFill>
-                      <a:prstDash val="solid"/>
-                      <a:round/>
-                      <a:headEnd type="none" w="med" len="med"/>
-                      <a:tailEnd type="none" w="med" len="med"/>
-                    </a:lnL>
-                    <a:lnR w="6350" cap="flat" cmpd="sng" algn="ctr">
-                      <a:solidFill>
-                        <a:srgbClr val="CBD5E1"/>
-                      </a:solidFill>
-                      <a:prstDash val="solid"/>
-                      <a:round/>
-                      <a:headEnd type="none" w="med" len="med"/>
-                      <a:tailEnd type="none" w="med" len="med"/>
-                    </a:lnR>
-                    <a:lnT w="6350" cap="flat" cmpd="sng" algn="ctr">
-                      <a:solidFill>
-                        <a:srgbClr val="CBD5E1"/>
-                      </a:solidFill>
-                      <a:prstDash val="solid"/>
-                      <a:round/>
-                      <a:headEnd type="none" w="med" len="med"/>
-                      <a:tailEnd type="none" w="med" len="med"/>
-                    </a:lnT>
-                    <a:lnB w="6350" cap="flat" cmpd="sng" algn="ctr">
-                      <a:solidFill>
-                        <a:srgbClr val="CBD5E1"/>
-                      </a:solidFill>
-                      <a:prstDash val="solid"/>
-                      <a:round/>
-                      <a:headEnd type="none" w="med" len="med"/>
-                      <a:tailEnd type="none" w="med" len="med"/>
-                    </a:lnB>
-                  </a:tcPr>
-                </a:tc>
-                <a:tc>
-                  <a:txBody>
-                    <a:bodyPr/>
-                    <a:lstStyle/>
-                    <a:p>
-                      <a:pPr algn="ctr" indent="0" marL="0">
-                        <a:buNone/>
-                      </a:pPr>
-                      <a:r>
-                        <a:rPr lang="en-US" sz="850" b="1" dirty="0">
-                          <a:solidFill>
-                            <a:srgbClr val="0284C7"/>
-                          </a:solidFill>
-                          <a:latin typeface="Arial" pitchFamily="34" charset="0"/>
-                          <a:ea typeface="Arial" pitchFamily="34" charset="-122"/>
-                          <a:cs typeface="Arial" pitchFamily="34" charset="-120"/>
-                        </a:rPr>
-                        <a:t>$15.00</a:t>
-                      </a:r>
-                      <a:endParaRPr lang="en-US" sz="850" dirty="0">
-                        <a:latin typeface="Arial" charset="0"/>
-                        <a:ea typeface="Arial" charset="0"/>
-                        <a:cs typeface="Arial" charset="0"/>
-                      </a:endParaRPr>
-                    </a:p>
-                  </a:txBody>
-                  <a:tcPr marL="91440" marR="91440" marT="45720" marB="45720" anchor="ctr">
-                    <a:lnL w="6350" cap="flat" cmpd="sng" algn="ctr">
-                      <a:solidFill>
-                        <a:srgbClr val="CBD5E1"/>
-                      </a:solidFill>
-                      <a:prstDash val="solid"/>
-                      <a:round/>
-                      <a:headEnd type="none" w="med" len="med"/>
-                      <a:tailEnd type="none" w="med" len="med"/>
-                    </a:lnL>
-                    <a:lnR w="6350" cap="flat" cmpd="sng" algn="ctr">
-                      <a:solidFill>
-                        <a:srgbClr val="CBD5E1"/>
-                      </a:solidFill>
-                      <a:prstDash val="solid"/>
-                      <a:round/>
-                      <a:headEnd type="none" w="med" len="med"/>
-                      <a:tailEnd type="none" w="med" len="med"/>
-                    </a:lnR>
-                    <a:lnT w="6350" cap="flat" cmpd="sng" algn="ctr">
-                      <a:solidFill>
-                        <a:srgbClr val="CBD5E1"/>
-                      </a:solidFill>
-                      <a:prstDash val="solid"/>
-                      <a:round/>
-                      <a:headEnd type="none" w="med" len="med"/>
-                      <a:tailEnd type="none" w="med" len="med"/>
-                    </a:lnT>
-                    <a:lnB w="6350" cap="flat" cmpd="sng" algn="ctr">
-                      <a:solidFill>
-                        <a:srgbClr val="CBD5E1"/>
-                      </a:solidFill>
-                      <a:prstDash val="solid"/>
-                      <a:round/>
-                      <a:headEnd type="none" w="med" len="med"/>
-                      <a:tailEnd type="none" w="med" len="med"/>
-                    </a:lnB>
-                  </a:tcPr>
-                </a:tc>
-                <a:tc>
-                  <a:txBody>
-                    <a:bodyPr/>
-                    <a:lstStyle/>
-                    <a:p>
-                      <a:pPr algn="ctr" indent="0" marL="0">
-                        <a:buNone/>
-                      </a:pPr>
-                      <a:r>
-                        <a:rPr lang="en-US" sz="850" dirty="0">
-                          <a:solidFill>
-                            <a:srgbClr val="334155"/>
-                          </a:solidFill>
-                          <a:latin typeface="Arial" pitchFamily="34" charset="0"/>
-                          <a:ea typeface="Arial" pitchFamily="34" charset="-122"/>
-                          <a:cs typeface="Arial" pitchFamily="34" charset="-120"/>
-                        </a:rPr>
-                        <a:t>2.5%</a:t>
-                      </a:r>
-                      <a:endParaRPr lang="en-US" sz="850" dirty="0">
-                        <a:latin typeface="Arial" charset="0"/>
-                        <a:ea typeface="Arial" charset="0"/>
-                        <a:cs typeface="Arial" charset="0"/>
-                      </a:endParaRPr>
-                    </a:p>
-                  </a:txBody>
-                  <a:tcPr marL="91440" marR="91440" marT="45720" marB="45720" anchor="ctr">
-                    <a:lnL w="6350" cap="flat" cmpd="sng" algn="ctr">
-                      <a:solidFill>
-                        <a:srgbClr val="CBD5E1"/>
-                      </a:solidFill>
-                      <a:prstDash val="solid"/>
-                      <a:round/>
-                      <a:headEnd type="none" w="med" len="med"/>
-                      <a:tailEnd type="none" w="med" len="med"/>
-                    </a:lnL>
-                    <a:lnR w="6350" cap="flat" cmpd="sng" algn="ctr">
-                      <a:solidFill>
-                        <a:srgbClr val="CBD5E1"/>
-                      </a:solidFill>
-                      <a:prstDash val="solid"/>
-                      <a:round/>
-                      <a:headEnd type="none" w="med" len="med"/>
-                      <a:tailEnd type="none" w="med" len="med"/>
-                    </a:lnR>
-                    <a:lnT w="6350" cap="flat" cmpd="sng" algn="ctr">
-                      <a:solidFill>
-                        <a:srgbClr val="CBD5E1"/>
-                      </a:solidFill>
-                      <a:prstDash val="solid"/>
-                      <a:round/>
-                      <a:headEnd type="none" w="med" len="med"/>
-                      <a:tailEnd type="none" w="med" len="med"/>
-                    </a:lnT>
-                    <a:lnB w="6350" cap="flat" cmpd="sng" algn="ctr">
-                      <a:solidFill>
-                        <a:srgbClr val="CBD5E1"/>
-                      </a:solidFill>
-                      <a:prstDash val="solid"/>
-                      <a:round/>
-                      <a:headEnd type="none" w="med" len="med"/>
-                      <a:tailEnd type="none" w="med" len="med"/>
-                    </a:lnB>
-                  </a:tcPr>
-                </a:tc>
-              </a:tr>
-              <a:tr h="339634">
-                <a:tc>
-                  <a:txBody>
-                    <a:bodyPr/>
-                    <a:lstStyle/>
-                    <a:p>
-                      <a:pPr algn="ctr" indent="0" marL="0">
-                        <a:buNone/>
-                      </a:pPr>
-                      <a:r>
-                        <a:rPr lang="en-US" sz="850" b="1" dirty="0">
-                          <a:solidFill>
-                            <a:srgbClr val="0F172A"/>
-                          </a:solidFill>
-                          <a:latin typeface="Arial" pitchFamily="34" charset="0"/>
-                          <a:ea typeface="Arial" pitchFamily="34" charset="-122"/>
-                          <a:cs typeface="Arial" pitchFamily="34" charset="-120"/>
-                        </a:rPr>
-                        <a:t>Calendar APIs &amp; DNS</a:t>
-                      </a:r>
-                      <a:endParaRPr lang="en-US" sz="850" dirty="0">
-                        <a:latin typeface="Arial" charset="0"/>
-                        <a:ea typeface="Arial" charset="0"/>
-                        <a:cs typeface="Arial" charset="0"/>
-                      </a:endParaRPr>
-                    </a:p>
-                  </a:txBody>
-                  <a:tcPr marL="91440" marR="91440" marT="45720" marB="45720" anchor="ctr">
-                    <a:lnL w="6350" cap="flat" cmpd="sng" algn="ctr">
-                      <a:solidFill>
-                        <a:srgbClr val="CBD5E1"/>
-                      </a:solidFill>
-                      <a:prstDash val="solid"/>
-                      <a:round/>
-                      <a:headEnd type="none" w="med" len="med"/>
-                      <a:tailEnd type="none" w="med" len="med"/>
-                    </a:lnL>
-                    <a:lnR w="6350" cap="flat" cmpd="sng" algn="ctr">
-                      <a:solidFill>
-                        <a:srgbClr val="CBD5E1"/>
-                      </a:solidFill>
-                      <a:prstDash val="solid"/>
-                      <a:round/>
-                      <a:headEnd type="none" w="med" len="med"/>
-                      <a:tailEnd type="none" w="med" len="med"/>
-                    </a:lnR>
-                    <a:lnT w="6350" cap="flat" cmpd="sng" algn="ctr">
-                      <a:solidFill>
-                        <a:srgbClr val="CBD5E1"/>
-                      </a:solidFill>
-                      <a:prstDash val="solid"/>
-                      <a:round/>
-                      <a:headEnd type="none" w="med" len="med"/>
-                      <a:tailEnd type="none" w="med" len="med"/>
-                    </a:lnT>
-                    <a:lnB w="6350" cap="flat" cmpd="sng" algn="ctr">
-                      <a:solidFill>
-                        <a:srgbClr val="CBD5E1"/>
-                      </a:solidFill>
-                      <a:prstDash val="solid"/>
-                      <a:round/>
-                      <a:headEnd type="none" w="med" len="med"/>
-                      <a:tailEnd type="none" w="med" len="med"/>
-                    </a:lnB>
-                  </a:tcPr>
-                </a:tc>
-                <a:tc>
-                  <a:txBody>
-                    <a:bodyPr/>
-                    <a:lstStyle/>
-                    <a:p>
-                      <a:pPr algn="ctr" indent="0" marL="0">
-                        <a:buNone/>
-                      </a:pPr>
-                      <a:r>
-                        <a:rPr lang="en-US" sz="850" dirty="0">
-                          <a:solidFill>
-                            <a:srgbClr val="334155"/>
-                          </a:solidFill>
-                          <a:latin typeface="Arial" pitchFamily="34" charset="0"/>
-                          <a:ea typeface="Arial" pitchFamily="34" charset="-122"/>
-                          <a:cs typeface="Arial" pitchFamily="34" charset="-120"/>
-                        </a:rPr>
-                        <a:t>Google &amp; MS Cloud</a:t>
-                      </a:r>
-                      <a:endParaRPr lang="en-US" sz="850" dirty="0">
-                        <a:latin typeface="Arial" charset="0"/>
-                        <a:ea typeface="Arial" charset="0"/>
-                        <a:cs typeface="Arial" charset="0"/>
-                      </a:endParaRPr>
-                    </a:p>
-                  </a:txBody>
-                  <a:tcPr marL="91440" marR="91440" marT="45720" marB="45720" anchor="ctr">
-                    <a:lnL w="6350" cap="flat" cmpd="sng" algn="ctr">
-                      <a:solidFill>
-                        <a:srgbClr val="CBD5E1"/>
-                      </a:solidFill>
-                      <a:prstDash val="solid"/>
-                      <a:round/>
-                      <a:headEnd type="none" w="med" len="med"/>
-                      <a:tailEnd type="none" w="med" len="med"/>
-                    </a:lnL>
-                    <a:lnR w="6350" cap="flat" cmpd="sng" algn="ctr">
-                      <a:solidFill>
-                        <a:srgbClr val="CBD5E1"/>
-                      </a:solidFill>
-                      <a:prstDash val="solid"/>
-                      <a:round/>
-                      <a:headEnd type="none" w="med" len="med"/>
-                      <a:tailEnd type="none" w="med" len="med"/>
-                    </a:lnR>
-                    <a:lnT w="6350" cap="flat" cmpd="sng" algn="ctr">
-                      <a:solidFill>
-                        <a:srgbClr val="CBD5E1"/>
-                      </a:solidFill>
-                      <a:prstDash val="solid"/>
-                      <a:round/>
-                      <a:headEnd type="none" w="med" len="med"/>
-                      <a:tailEnd type="none" w="med" len="med"/>
-                    </a:lnT>
-                    <a:lnB w="6350" cap="flat" cmpd="sng" algn="ctr">
-                      <a:solidFill>
-                        <a:srgbClr val="CBD5E1"/>
-                      </a:solidFill>
-                      <a:prstDash val="solid"/>
-                      <a:round/>
-                      <a:headEnd type="none" w="med" len="med"/>
-                      <a:tailEnd type="none" w="med" len="med"/>
-                    </a:lnB>
-                  </a:tcPr>
-                </a:tc>
-                <a:tc>
-                  <a:txBody>
-                    <a:bodyPr/>
-                    <a:lstStyle/>
-                    <a:p>
-                      <a:pPr algn="ctr" indent="0" marL="0">
-                        <a:buNone/>
-                      </a:pPr>
-                      <a:r>
-                        <a:rPr lang="en-US" sz="850" b="1" dirty="0">
-                          <a:solidFill>
-                            <a:srgbClr val="0284C7"/>
-                          </a:solidFill>
-                          <a:latin typeface="Arial" pitchFamily="34" charset="0"/>
-                          <a:ea typeface="Arial" pitchFamily="34" charset="-122"/>
-                          <a:cs typeface="Arial" pitchFamily="34" charset="-120"/>
-                        </a:rPr>
-                        <a:t>$5.00</a:t>
-                      </a:r>
-                      <a:endParaRPr lang="en-US" sz="850" dirty="0">
-                        <a:latin typeface="Arial" charset="0"/>
-                        <a:ea typeface="Arial" charset="0"/>
-                        <a:cs typeface="Arial" charset="0"/>
-                      </a:endParaRPr>
-                    </a:p>
-                  </a:txBody>
-                  <a:tcPr marL="91440" marR="91440" marT="45720" marB="45720" anchor="ctr">
-                    <a:lnL w="6350" cap="flat" cmpd="sng" algn="ctr">
-                      <a:solidFill>
-                        <a:srgbClr val="CBD5E1"/>
-                      </a:solidFill>
-                      <a:prstDash val="solid"/>
-                      <a:round/>
-                      <a:headEnd type="none" w="med" len="med"/>
-                      <a:tailEnd type="none" w="med" len="med"/>
-                    </a:lnL>
-                    <a:lnR w="6350" cap="flat" cmpd="sng" algn="ctr">
-                      <a:solidFill>
-                        <a:srgbClr val="CBD5E1"/>
-                      </a:solidFill>
-                      <a:prstDash val="solid"/>
-                      <a:round/>
-                      <a:headEnd type="none" w="med" len="med"/>
-                      <a:tailEnd type="none" w="med" len="med"/>
-                    </a:lnR>
-                    <a:lnT w="6350" cap="flat" cmpd="sng" algn="ctr">
-                      <a:solidFill>
-                        <a:srgbClr val="CBD5E1"/>
-                      </a:solidFill>
-                      <a:prstDash val="solid"/>
-                      <a:round/>
-                      <a:headEnd type="none" w="med" len="med"/>
-                      <a:tailEnd type="none" w="med" len="med"/>
-                    </a:lnT>
-                    <a:lnB w="6350" cap="flat" cmpd="sng" algn="ctr">
-                      <a:solidFill>
-                        <a:srgbClr val="CBD5E1"/>
-                      </a:solidFill>
-                      <a:prstDash val="solid"/>
-                      <a:round/>
-                      <a:headEnd type="none" w="med" len="med"/>
-                      <a:tailEnd type="none" w="med" len="med"/>
-                    </a:lnB>
-                  </a:tcPr>
-                </a:tc>
-                <a:tc>
-                  <a:txBody>
-                    <a:bodyPr/>
-                    <a:lstStyle/>
-                    <a:p>
-                      <a:pPr algn="ctr" indent="0" marL="0">
-                        <a:buNone/>
-                      </a:pPr>
-                      <a:r>
-                        <a:rPr lang="en-US" sz="850" dirty="0">
-                          <a:solidFill>
-                            <a:srgbClr val="334155"/>
-                          </a:solidFill>
-                          <a:latin typeface="Arial" pitchFamily="34" charset="0"/>
-                          <a:ea typeface="Arial" pitchFamily="34" charset="-122"/>
-                          <a:cs typeface="Arial" pitchFamily="34" charset="-120"/>
-                        </a:rPr>
-                        <a:t>0.8%</a:t>
-                      </a:r>
-                      <a:endParaRPr lang="en-US" sz="850" dirty="0">
-                        <a:latin typeface="Arial" charset="0"/>
-                        <a:ea typeface="Arial" charset="0"/>
-                        <a:cs typeface="Arial" charset="0"/>
-                      </a:endParaRPr>
-                    </a:p>
-                  </a:txBody>
-                  <a:tcPr marL="91440" marR="91440" marT="45720" marB="45720" anchor="ctr">
-                    <a:lnL w="6350" cap="flat" cmpd="sng" algn="ctr">
-                      <a:solidFill>
-                        <a:srgbClr val="CBD5E1"/>
-                      </a:solidFill>
-                      <a:prstDash val="solid"/>
-                      <a:round/>
-                      <a:headEnd type="none" w="med" len="med"/>
-                      <a:tailEnd type="none" w="med" len="med"/>
-                    </a:lnL>
-                    <a:lnR w="6350" cap="flat" cmpd="sng" algn="ctr">
-                      <a:solidFill>
-                        <a:srgbClr val="CBD5E1"/>
-                      </a:solidFill>
-                      <a:prstDash val="solid"/>
-                      <a:round/>
-                      <a:headEnd type="none" w="med" len="med"/>
-                      <a:tailEnd type="none" w="med" len="med"/>
-                    </a:lnR>
-                    <a:lnT w="6350" cap="flat" cmpd="sng" algn="ctr">
-                      <a:solidFill>
-                        <a:srgbClr val="CBD5E1"/>
-                      </a:solidFill>
-                      <a:prstDash val="solid"/>
-                      <a:round/>
-                      <a:headEnd type="none" w="med" len="med"/>
-                      <a:tailEnd type="none" w="med" len="med"/>
-                    </a:lnT>
-                    <a:lnB w="6350" cap="flat" cmpd="sng" algn="ctr">
-                      <a:solidFill>
-                        <a:srgbClr val="CBD5E1"/>
-                      </a:solidFill>
-                      <a:prstDash val="solid"/>
-                      <a:round/>
-                      <a:headEnd type="none" w="med" len="med"/>
-                      <a:tailEnd type="none" w="med" len="med"/>
-                    </a:lnB>
-                  </a:tcPr>
-                </a:tc>
-              </a:tr>
-              <a:tr h="339634">
-                <a:tc>
-                  <a:txBody>
-                    <a:bodyPr/>
-                    <a:lstStyle/>
-                    <a:p>
-                      <a:pPr algn="ctr" indent="0" marL="0">
-                        <a:buNone/>
-                      </a:pPr>
-                      <a:r>
-                        <a:rPr lang="en-US" sz="850" b="1" dirty="0">
-                          <a:solidFill>
-                            <a:srgbClr val="FFFFFF"/>
-                          </a:solidFill>
-                          <a:latin typeface="Arial" pitchFamily="34" charset="0"/>
-                          <a:ea typeface="Arial" pitchFamily="34" charset="-122"/>
-                          <a:cs typeface="Arial" pitchFamily="34" charset="-120"/>
-                        </a:rPr>
-                        <a:t>TOTAL MONTHLY OPEX</a:t>
-                      </a:r>
-                      <a:endParaRPr lang="en-US" sz="850" dirty="0">
-                        <a:latin typeface="Arial" charset="0"/>
-                        <a:ea typeface="Arial" charset="0"/>
-                        <a:cs typeface="Arial" charset="0"/>
-                      </a:endParaRPr>
-                    </a:p>
-                  </a:txBody>
-                  <a:tcPr marL="91440" marR="91440" marT="45720" marB="45720" anchor="ctr">
-                    <a:lnL w="6350" cap="flat" cmpd="sng" algn="ctr">
-                      <a:solidFill>
-                        <a:srgbClr val="CBD5E1"/>
-                      </a:solidFill>
-                      <a:prstDash val="solid"/>
-                      <a:round/>
-                      <a:headEnd type="none" w="med" len="med"/>
-                      <a:tailEnd type="none" w="med" len="med"/>
-                    </a:lnL>
-                    <a:lnR w="6350" cap="flat" cmpd="sng" algn="ctr">
-                      <a:solidFill>
-                        <a:srgbClr val="CBD5E1"/>
-                      </a:solidFill>
-                      <a:prstDash val="solid"/>
-                      <a:round/>
-                      <a:headEnd type="none" w="med" len="med"/>
-                      <a:tailEnd type="none" w="med" len="med"/>
-                    </a:lnR>
-                    <a:lnT w="6350" cap="flat" cmpd="sng" algn="ctr">
-                      <a:solidFill>
-                        <a:srgbClr val="CBD5E1"/>
-                      </a:solidFill>
-                      <a:prstDash val="solid"/>
-                      <a:round/>
-                      <a:headEnd type="none" w="med" len="med"/>
-                      <a:tailEnd type="none" w="med" len="med"/>
-                    </a:lnT>
-                    <a:lnB w="6350" cap="flat" cmpd="sng" algn="ctr">
-                      <a:solidFill>
-                        <a:srgbClr val="CBD5E1"/>
-                      </a:solidFill>
-                      <a:prstDash val="solid"/>
-                      <a:round/>
-                      <a:headEnd type="none" w="med" len="med"/>
-                      <a:tailEnd type="none" w="med" len="med"/>
-                    </a:lnB>
-                    <a:solidFill>
-                      <a:srgbClr val="0284C7"/>
-                    </a:solidFill>
-                  </a:tcPr>
-                </a:tc>
-                <a:tc>
-                  <a:txBody>
-                    <a:bodyPr/>
-                    <a:lstStyle/>
-                    <a:p>
-                      <a:pPr algn="ctr" indent="0" marL="0">
-                        <a:buNone/>
-                      </a:pPr>
-                      <a:r>
-                        <a:rPr lang="en-US" sz="850" b="1" dirty="0">
-                          <a:solidFill>
-                            <a:srgbClr val="FFFFFF"/>
-                          </a:solidFill>
-                          <a:latin typeface="Arial" pitchFamily="34" charset="0"/>
-                          <a:ea typeface="Arial" pitchFamily="34" charset="-122"/>
-                          <a:cs typeface="Arial" pitchFamily="34" charset="-120"/>
-                        </a:rPr>
-                        <a:t>~650 Patient Bookings</a:t>
-                      </a:r>
-                      <a:endParaRPr lang="en-US" sz="850" dirty="0">
-                        <a:latin typeface="Arial" charset="0"/>
-                        <a:ea typeface="Arial" charset="0"/>
-                        <a:cs typeface="Arial" charset="0"/>
-                      </a:endParaRPr>
-                    </a:p>
-                  </a:txBody>
-                  <a:tcPr marL="91440" marR="91440" marT="45720" marB="45720" anchor="ctr">
-                    <a:lnL w="6350" cap="flat" cmpd="sng" algn="ctr">
-                      <a:solidFill>
-                        <a:srgbClr val="CBD5E1"/>
-                      </a:solidFill>
-                      <a:prstDash val="solid"/>
-                      <a:round/>
-                      <a:headEnd type="none" w="med" len="med"/>
-                      <a:tailEnd type="none" w="med" len="med"/>
-                    </a:lnL>
-                    <a:lnR w="6350" cap="flat" cmpd="sng" algn="ctr">
-                      <a:solidFill>
-                        <a:srgbClr val="CBD5E1"/>
-                      </a:solidFill>
-                      <a:prstDash val="solid"/>
-                      <a:round/>
-                      <a:headEnd type="none" w="med" len="med"/>
-                      <a:tailEnd type="none" w="med" len="med"/>
-                    </a:lnR>
-                    <a:lnT w="6350" cap="flat" cmpd="sng" algn="ctr">
-                      <a:solidFill>
-                        <a:srgbClr val="CBD5E1"/>
-                      </a:solidFill>
-                      <a:prstDash val="solid"/>
-                      <a:round/>
-                      <a:headEnd type="none" w="med" len="med"/>
-                      <a:tailEnd type="none" w="med" len="med"/>
-                    </a:lnT>
-                    <a:lnB w="6350" cap="flat" cmpd="sng" algn="ctr">
-                      <a:solidFill>
-                        <a:srgbClr val="CBD5E1"/>
-                      </a:solidFill>
-                      <a:prstDash val="solid"/>
-                      <a:round/>
-                      <a:headEnd type="none" w="med" len="med"/>
-                      <a:tailEnd type="none" w="med" len="med"/>
-                    </a:lnB>
-                    <a:solidFill>
-                      <a:srgbClr val="0284C7"/>
-                    </a:solidFill>
-                  </a:tcPr>
-                </a:tc>
-                <a:tc>
-                  <a:txBody>
-                    <a:bodyPr/>
-                    <a:lstStyle/>
-                    <a:p>
-                      <a:pPr algn="ctr" indent="0" marL="0">
-                        <a:buNone/>
-                      </a:pPr>
-                      <a:r>
-                        <a:rPr lang="en-US" sz="850" b="1" dirty="0">
-                          <a:solidFill>
-                            <a:srgbClr val="FFFFFF"/>
-                          </a:solidFill>
-                          <a:latin typeface="Arial" pitchFamily="34" charset="0"/>
-                          <a:ea typeface="Arial" pitchFamily="34" charset="-122"/>
-                          <a:cs typeface="Arial" pitchFamily="34" charset="-120"/>
-                        </a:rPr>
-                        <a:t>$599.05</a:t>
-                      </a:r>
-                      <a:endParaRPr lang="en-US" sz="850" dirty="0">
-                        <a:latin typeface="Arial" charset="0"/>
-                        <a:ea typeface="Arial" charset="0"/>
-                        <a:cs typeface="Arial" charset="0"/>
-                      </a:endParaRPr>
-                    </a:p>
-                  </a:txBody>
-                  <a:tcPr marL="91440" marR="91440" marT="45720" marB="45720" anchor="ctr">
-                    <a:lnL w="6350" cap="flat" cmpd="sng" algn="ctr">
-                      <a:solidFill>
-                        <a:srgbClr val="CBD5E1"/>
-                      </a:solidFill>
-                      <a:prstDash val="solid"/>
-                      <a:round/>
-                      <a:headEnd type="none" w="med" len="med"/>
-                      <a:tailEnd type="none" w="med" len="med"/>
-                    </a:lnL>
-                    <a:lnR w="6350" cap="flat" cmpd="sng" algn="ctr">
-                      <a:solidFill>
-                        <a:srgbClr val="CBD5E1"/>
-                      </a:solidFill>
-                      <a:prstDash val="solid"/>
-                      <a:round/>
-                      <a:headEnd type="none" w="med" len="med"/>
-                      <a:tailEnd type="none" w="med" len="med"/>
-                    </a:lnR>
-                    <a:lnT w="6350" cap="flat" cmpd="sng" algn="ctr">
-                      <a:solidFill>
-                        <a:srgbClr val="CBD5E1"/>
-                      </a:solidFill>
-                      <a:prstDash val="solid"/>
-                      <a:round/>
-                      <a:headEnd type="none" w="med" len="med"/>
-                      <a:tailEnd type="none" w="med" len="med"/>
-                    </a:lnT>
-                    <a:lnB w="6350" cap="flat" cmpd="sng" algn="ctr">
-                      <a:solidFill>
-                        <a:srgbClr val="CBD5E1"/>
-                      </a:solidFill>
-                      <a:prstDash val="solid"/>
-                      <a:round/>
-                      <a:headEnd type="none" w="med" len="med"/>
-                      <a:tailEnd type="none" w="med" len="med"/>
-                    </a:lnB>
-                    <a:solidFill>
-                      <a:srgbClr val="0284C7"/>
-                    </a:solidFill>
-                  </a:tcPr>
-                </a:tc>
-                <a:tc>
-                  <a:txBody>
-                    <a:bodyPr/>
-                    <a:lstStyle/>
-                    <a:p>
-                      <a:pPr algn="ctr" indent="0" marL="0">
-                        <a:buNone/>
-                      </a:pPr>
-                      <a:r>
-                        <a:rPr lang="en-US" sz="850" b="1" dirty="0">
-                          <a:solidFill>
-                            <a:srgbClr val="FFFFFF"/>
-                          </a:solidFill>
-                          <a:latin typeface="Arial" pitchFamily="34" charset="0"/>
-                          <a:ea typeface="Arial" pitchFamily="34" charset="-122"/>
-                          <a:cs typeface="Arial" pitchFamily="34" charset="-120"/>
-                        </a:rPr>
-                        <a:t>100.0%</a:t>
-                      </a:r>
-                      <a:endParaRPr lang="en-US" sz="850" dirty="0">
-                        <a:latin typeface="Arial" charset="0"/>
-                        <a:ea typeface="Arial" charset="0"/>
-                        <a:cs typeface="Arial" charset="0"/>
-                      </a:endParaRPr>
-                    </a:p>
-                  </a:txBody>
-                  <a:tcPr marL="91440" marR="91440" marT="45720" marB="45720" anchor="ctr">
-                    <a:lnL w="6350" cap="flat" cmpd="sng" algn="ctr">
-                      <a:solidFill>
-                        <a:srgbClr val="CBD5E1"/>
-                      </a:solidFill>
-                      <a:prstDash val="solid"/>
-                      <a:round/>
-                      <a:headEnd type="none" w="med" len="med"/>
-                      <a:tailEnd type="none" w="med" len="med"/>
-                    </a:lnL>
-                    <a:lnR w="6350" cap="flat" cmpd="sng" algn="ctr">
-                      <a:solidFill>
-                        <a:srgbClr val="CBD5E1"/>
-                      </a:solidFill>
-                      <a:prstDash val="solid"/>
-                      <a:round/>
-                      <a:headEnd type="none" w="med" len="med"/>
-                      <a:tailEnd type="none" w="med" len="med"/>
-                    </a:lnR>
-                    <a:lnT w="6350" cap="flat" cmpd="sng" algn="ctr">
-                      <a:solidFill>
-                        <a:srgbClr val="CBD5E1"/>
-                      </a:solidFill>
-                      <a:prstDash val="solid"/>
-                      <a:round/>
-                      <a:headEnd type="none" w="med" len="med"/>
-                      <a:tailEnd type="none" w="med" len="med"/>
-                    </a:lnT>
-                    <a:lnB w="6350" cap="flat" cmpd="sng" algn="ctr">
-                      <a:solidFill>
-                        <a:srgbClr val="CBD5E1"/>
-                      </a:solidFill>
-                      <a:prstDash val="solid"/>
-                      <a:round/>
-                      <a:headEnd type="none" w="med" len="med"/>
-                      <a:tailEnd type="none" w="med" len="med"/>
-                    </a:lnB>
-                    <a:solidFill>
-                      <a:srgbClr val="0284C7"/>
-                    </a:solidFill>
-                  </a:tcPr>
-                </a:tc>
-              </a:tr>
             </a:tbl>
           </a:graphicData>
         </a:graphic>
@@ -12876,327 +11814,12 @@
         </p:nvSpPr>
         <p:spPr>
           <a:xfrm>
-            <a:off x="731520" y="3931920"/>
-            <a:ext cx="1371600" cy="640080"/>
+            <a:off x="5532120" y="1417320"/>
+            <a:ext cx="2880360" cy="3154680"/>
           </a:xfrm>
           <a:prstGeom prst="roundRect">
             <a:avLst>
-              <a:gd name="adj" fmla="val 8571"/>
-            </a:avLst>
-          </a:prstGeom>
-          <a:solidFill>
-            <a:srgbClr val="E0F2FE"/>
-          </a:solidFill>
-          <a:ln w="12700">
-            <a:solidFill>
-              <a:srgbClr val="BAE6FD"/>
-            </a:solidFill>
-            <a:prstDash val="solid"/>
-          </a:ln>
-        </p:spPr>
-      </p:sp>
-      <p:sp>
-        <p:nvSpPr>
-          <p:cNvPr id="7" name="Text 4"/>
-          <p:cNvSpPr/>
-          <p:nvPr/>
-        </p:nvSpPr>
-        <p:spPr>
-          <a:xfrm>
-            <a:off x="777240" y="4023360"/>
-            <a:ext cx="1280160" cy="228600"/>
-          </a:xfrm>
-          <a:prstGeom prst="rect">
-            <a:avLst/>
-          </a:prstGeom>
-          <a:noFill/>
-          <a:ln/>
-        </p:spPr>
-        <p:txBody>
-          <a:bodyPr wrap="square" rtlCol="0" anchor="ctr"/>
-          <a:lstStyle/>
-          <a:p>
-            <a:pPr algn="ctr" indent="0" marL="0">
-              <a:buNone/>
-            </a:pPr>
-            <a:r>
-              <a:rPr lang="en-US" sz="1100" b="1" dirty="0">
-                <a:solidFill>
-                  <a:srgbClr val="0F172A"/>
-                </a:solidFill>
-                <a:latin typeface="Arial" pitchFamily="34" charset="0"/>
-                <a:ea typeface="Arial" pitchFamily="34" charset="-122"/>
-                <a:cs typeface="Arial" pitchFamily="34" charset="-120"/>
-              </a:rPr>
-              <a:t>$0.56 / call</a:t>
-            </a:r>
-            <a:endParaRPr lang="en-US" sz="1100" dirty="0"/>
-          </a:p>
-        </p:txBody>
-      </p:sp>
-      <p:sp>
-        <p:nvSpPr>
-          <p:cNvPr id="8" name="Text 5"/>
-          <p:cNvSpPr/>
-          <p:nvPr/>
-        </p:nvSpPr>
-        <p:spPr>
-          <a:xfrm>
-            <a:off x="777240" y="4279392"/>
-            <a:ext cx="1280160" cy="182880"/>
-          </a:xfrm>
-          <a:prstGeom prst="rect">
-            <a:avLst/>
-          </a:prstGeom>
-          <a:noFill/>
-          <a:ln/>
-        </p:spPr>
-        <p:txBody>
-          <a:bodyPr wrap="square" rtlCol="0" anchor="ctr"/>
-          <a:lstStyle/>
-          <a:p>
-            <a:pPr algn="ctr" indent="0" marL="0">
-              <a:buNone/>
-            </a:pPr>
-            <a:r>
-              <a:rPr lang="en-US" sz="700" b="1" dirty="0">
-                <a:solidFill>
-                  <a:srgbClr val="0284C7"/>
-                </a:solidFill>
-                <a:latin typeface="Arial" pitchFamily="34" charset="0"/>
-                <a:ea typeface="Arial" pitchFamily="34" charset="-122"/>
-                <a:cs typeface="Arial" pitchFamily="34" charset="-120"/>
-              </a:rPr>
-              <a:t>COST PER VOICE CALL</a:t>
-            </a:r>
-            <a:endParaRPr lang="en-US" sz="700" dirty="0"/>
-          </a:p>
-        </p:txBody>
-      </p:sp>
-      <p:sp>
-        <p:nvSpPr>
-          <p:cNvPr id="9" name="Shape 6"/>
-          <p:cNvSpPr/>
-          <p:nvPr/>
-        </p:nvSpPr>
-        <p:spPr>
-          <a:xfrm>
-            <a:off x="2194560" y="3931920"/>
-            <a:ext cx="1371600" cy="640080"/>
-          </a:xfrm>
-          <a:prstGeom prst="roundRect">
-            <a:avLst>
-              <a:gd name="adj" fmla="val 8571"/>
-            </a:avLst>
-          </a:prstGeom>
-          <a:solidFill>
-            <a:srgbClr val="E0F2FE"/>
-          </a:solidFill>
-          <a:ln w="12700">
-            <a:solidFill>
-              <a:srgbClr val="BAE6FD"/>
-            </a:solidFill>
-            <a:prstDash val="solid"/>
-          </a:ln>
-        </p:spPr>
-      </p:sp>
-      <p:sp>
-        <p:nvSpPr>
-          <p:cNvPr id="10" name="Text 7"/>
-          <p:cNvSpPr/>
-          <p:nvPr/>
-        </p:nvSpPr>
-        <p:spPr>
-          <a:xfrm>
-            <a:off x="2240280" y="4023360"/>
-            <a:ext cx="1280160" cy="228600"/>
-          </a:xfrm>
-          <a:prstGeom prst="rect">
-            <a:avLst/>
-          </a:prstGeom>
-          <a:noFill/>
-          <a:ln/>
-        </p:spPr>
-        <p:txBody>
-          <a:bodyPr wrap="square" rtlCol="0" anchor="ctr"/>
-          <a:lstStyle/>
-          <a:p>
-            <a:pPr algn="ctr" indent="0" marL="0">
-              <a:buNone/>
-            </a:pPr>
-            <a:r>
-              <a:rPr lang="en-US" sz="1100" b="1" dirty="0">
-                <a:solidFill>
-                  <a:srgbClr val="0F172A"/>
-                </a:solidFill>
-                <a:latin typeface="Arial" pitchFamily="34" charset="0"/>
-                <a:ea typeface="Arial" pitchFamily="34" charset="-122"/>
-                <a:cs typeface="Arial" pitchFamily="34" charset="-120"/>
-              </a:rPr>
-              <a:t>$0.0014 / chat</a:t>
-            </a:r>
-            <a:endParaRPr lang="en-US" sz="1100" dirty="0"/>
-          </a:p>
-        </p:txBody>
-      </p:sp>
-      <p:sp>
-        <p:nvSpPr>
-          <p:cNvPr id="11" name="Text 8"/>
-          <p:cNvSpPr/>
-          <p:nvPr/>
-        </p:nvSpPr>
-        <p:spPr>
-          <a:xfrm>
-            <a:off x="2240280" y="4279392"/>
-            <a:ext cx="1280160" cy="182880"/>
-          </a:xfrm>
-          <a:prstGeom prst="rect">
-            <a:avLst/>
-          </a:prstGeom>
-          <a:noFill/>
-          <a:ln/>
-        </p:spPr>
-        <p:txBody>
-          <a:bodyPr wrap="square" rtlCol="0" anchor="ctr"/>
-          <a:lstStyle/>
-          <a:p>
-            <a:pPr algn="ctr" indent="0" marL="0">
-              <a:buNone/>
-            </a:pPr>
-            <a:r>
-              <a:rPr lang="en-US" sz="700" b="1" dirty="0">
-                <a:solidFill>
-                  <a:srgbClr val="0284C7"/>
-                </a:solidFill>
-                <a:latin typeface="Arial" pitchFamily="34" charset="0"/>
-                <a:ea typeface="Arial" pitchFamily="34" charset="-122"/>
-                <a:cs typeface="Arial" pitchFamily="34" charset="-120"/>
-              </a:rPr>
-              <a:t>COST PER CHAT</a:t>
-            </a:r>
-            <a:endParaRPr lang="en-US" sz="700" dirty="0"/>
-          </a:p>
-        </p:txBody>
-      </p:sp>
-      <p:sp>
-        <p:nvSpPr>
-          <p:cNvPr id="12" name="Shape 9"/>
-          <p:cNvSpPr/>
-          <p:nvPr/>
-        </p:nvSpPr>
-        <p:spPr>
-          <a:xfrm>
-            <a:off x="3657600" y="3931920"/>
-            <a:ext cx="1371600" cy="640080"/>
-          </a:xfrm>
-          <a:prstGeom prst="roundRect">
-            <a:avLst>
-              <a:gd name="adj" fmla="val 8571"/>
-            </a:avLst>
-          </a:prstGeom>
-          <a:solidFill>
-            <a:srgbClr val="E0F2FE"/>
-          </a:solidFill>
-          <a:ln w="12700">
-            <a:solidFill>
-              <a:srgbClr val="BAE6FD"/>
-            </a:solidFill>
-            <a:prstDash val="solid"/>
-          </a:ln>
-        </p:spPr>
-      </p:sp>
-      <p:sp>
-        <p:nvSpPr>
-          <p:cNvPr id="13" name="Text 10"/>
-          <p:cNvSpPr/>
-          <p:nvPr/>
-        </p:nvSpPr>
-        <p:spPr>
-          <a:xfrm>
-            <a:off x="3703320" y="4023360"/>
-            <a:ext cx="1280160" cy="228600"/>
-          </a:xfrm>
-          <a:prstGeom prst="rect">
-            <a:avLst/>
-          </a:prstGeom>
-          <a:noFill/>
-          <a:ln/>
-        </p:spPr>
-        <p:txBody>
-          <a:bodyPr wrap="square" rtlCol="0" anchor="ctr"/>
-          <a:lstStyle/>
-          <a:p>
-            <a:pPr algn="ctr" indent="0" marL="0">
-              <a:buNone/>
-            </a:pPr>
-            <a:r>
-              <a:rPr lang="en-US" sz="1100" b="1" dirty="0">
-                <a:solidFill>
-                  <a:srgbClr val="0F172A"/>
-                </a:solidFill>
-                <a:latin typeface="Arial" pitchFamily="34" charset="0"/>
-                <a:ea typeface="Arial" pitchFamily="34" charset="-122"/>
-                <a:cs typeface="Arial" pitchFamily="34" charset="-120"/>
-              </a:rPr>
-              <a:t>$0.92 / booking</a:t>
-            </a:r>
-            <a:endParaRPr lang="en-US" sz="1100" dirty="0"/>
-          </a:p>
-        </p:txBody>
-      </p:sp>
-      <p:sp>
-        <p:nvSpPr>
-          <p:cNvPr id="14" name="Text 11"/>
-          <p:cNvSpPr/>
-          <p:nvPr/>
-        </p:nvSpPr>
-        <p:spPr>
-          <a:xfrm>
-            <a:off x="3703320" y="4279392"/>
-            <a:ext cx="1280160" cy="182880"/>
-          </a:xfrm>
-          <a:prstGeom prst="rect">
-            <a:avLst/>
-          </a:prstGeom>
-          <a:noFill/>
-          <a:ln/>
-        </p:spPr>
-        <p:txBody>
-          <a:bodyPr wrap="square" rtlCol="0" anchor="ctr"/>
-          <a:lstStyle/>
-          <a:p>
-            <a:pPr algn="ctr" indent="0" marL="0">
-              <a:buNone/>
-            </a:pPr>
-            <a:r>
-              <a:rPr lang="en-US" sz="700" b="1" dirty="0">
-                <a:solidFill>
-                  <a:srgbClr val="0284C7"/>
-                </a:solidFill>
-                <a:latin typeface="Arial" pitchFamily="34" charset="0"/>
-                <a:ea typeface="Arial" pitchFamily="34" charset="-122"/>
-                <a:cs typeface="Arial" pitchFamily="34" charset="-120"/>
-              </a:rPr>
-              <a:t>COST PER BOOKED PATIENT</a:t>
-            </a:r>
-            <a:endParaRPr lang="en-US" sz="700" dirty="0"/>
-          </a:p>
-        </p:txBody>
-      </p:sp>
-      <p:sp>
-        <p:nvSpPr>
-          <p:cNvPr id="15" name="Shape 12"/>
-          <p:cNvSpPr/>
-          <p:nvPr/>
-        </p:nvSpPr>
-        <p:spPr>
-          <a:xfrm>
-            <a:off x="5257800" y="1417320"/>
-            <a:ext cx="3154680" cy="3154680"/>
-          </a:xfrm>
-          <a:prstGeom prst="roundRect">
-            <a:avLst>
-              <a:gd name="adj" fmla="val 2899"/>
+              <a:gd name="adj" fmla="val 3175"/>
             </a:avLst>
           </a:prstGeom>
           <a:solidFill>
@@ -13212,14 +11835,14 @@
       </p:sp>
       <p:sp>
         <p:nvSpPr>
-          <p:cNvPr id="16" name="Text 13"/>
-          <p:cNvSpPr/>
-          <p:nvPr/>
-        </p:nvSpPr>
-        <p:spPr>
-          <a:xfrm>
-            <a:off x="5440680" y="1554480"/>
-            <a:ext cx="2788920" cy="201168"/>
+          <p:cNvPr id="7" name="Text 4"/>
+          <p:cNvSpPr/>
+          <p:nvPr/>
+        </p:nvSpPr>
+        <p:spPr>
+          <a:xfrm>
+            <a:off x="5715000" y="1554480"/>
+            <a:ext cx="2514600" cy="201168"/>
           </a:xfrm>
           <a:prstGeom prst="rect">
             <a:avLst/>
@@ -13243,7 +11866,7 @@
                 <a:ea typeface="Arial" pitchFamily="34" charset="-122"/>
                 <a:cs typeface="Arial" pitchFamily="34" charset="-120"/>
               </a:rPr>
-              <a:t>RECEPTIONIST COST VS. AI BOT</a:t>
+              <a:t>TWO WAYS TO RUN VOICE</a:t>
             </a:r>
             <a:endParaRPr lang="en-US" sz="950" dirty="0"/>
           </a:p>
@@ -13251,18 +11874,18 @@
       </p:sp>
       <p:sp>
         <p:nvSpPr>
-          <p:cNvPr id="17" name="Shape 14"/>
-          <p:cNvSpPr/>
-          <p:nvPr/>
-        </p:nvSpPr>
-        <p:spPr>
-          <a:xfrm>
-            <a:off x="5440680" y="1828800"/>
-            <a:ext cx="2788920" cy="914400"/>
+          <p:cNvPr id="8" name="Shape 5"/>
+          <p:cNvSpPr/>
+          <p:nvPr/>
+        </p:nvSpPr>
+        <p:spPr>
+          <a:xfrm>
+            <a:off x="5715000" y="1828800"/>
+            <a:ext cx="2514600" cy="1051560"/>
           </a:xfrm>
           <a:prstGeom prst="roundRect">
             <a:avLst>
-              <a:gd name="adj" fmla="val 8000"/>
+              <a:gd name="adj" fmla="val 6957"/>
             </a:avLst>
           </a:prstGeom>
           <a:solidFill>
@@ -13278,14 +11901,14 @@
       </p:sp>
       <p:sp>
         <p:nvSpPr>
-          <p:cNvPr id="18" name="Text 15"/>
-          <p:cNvSpPr/>
-          <p:nvPr/>
-        </p:nvSpPr>
-        <p:spPr>
-          <a:xfrm>
-            <a:off x="5577840" y="1892808"/>
-            <a:ext cx="2514600" cy="182880"/>
+          <p:cNvPr id="9" name="Text 6"/>
+          <p:cNvSpPr/>
+          <p:nvPr/>
+        </p:nvSpPr>
+        <p:spPr>
+          <a:xfrm>
+            <a:off x="5852160" y="1920240"/>
+            <a:ext cx="2240280" cy="201168"/>
           </a:xfrm>
           <a:prstGeom prst="rect">
             <a:avLst/>
@@ -13309,7 +11932,7 @@
                 <a:ea typeface="Arial" pitchFamily="34" charset="-122"/>
                 <a:cs typeface="Arial" pitchFamily="34" charset="-120"/>
               </a:rPr>
-              <a:t>Human Dental Receptionist</a:t>
+              <a:t>Hosted Realtime Voice</a:t>
             </a:r>
             <a:endParaRPr lang="en-US" sz="1000" dirty="0"/>
           </a:p>
@@ -13317,14 +11940,14 @@
       </p:sp>
       <p:sp>
         <p:nvSpPr>
-          <p:cNvPr id="19" name="Text 16"/>
-          <p:cNvSpPr/>
-          <p:nvPr/>
-        </p:nvSpPr>
-        <p:spPr>
-          <a:xfrm>
-            <a:off x="5577840" y="2075688"/>
-            <a:ext cx="2514600" cy="274320"/>
+          <p:cNvPr id="10" name="Text 7"/>
+          <p:cNvSpPr/>
+          <p:nvPr/>
+        </p:nvSpPr>
+        <p:spPr>
+          <a:xfrm>
+            <a:off x="5852160" y="2130552"/>
+            <a:ext cx="2240280" cy="228600"/>
           </a:xfrm>
           <a:prstGeom prst="rect">
             <a:avLst/>
@@ -13340,7 +11963,7 @@
               <a:buNone/>
             </a:pPr>
             <a:r>
-              <a:rPr lang="en-US" sz="1600" b="1" dirty="0">
+              <a:rPr lang="en-US" sz="1200" b="1" dirty="0">
                 <a:solidFill>
                   <a:srgbClr val="991B1B"/>
                 </a:solidFill>
@@ -13348,22 +11971,22 @@
                 <a:ea typeface="Arial" pitchFamily="34" charset="-122"/>
                 <a:cs typeface="Arial" pitchFamily="34" charset="-120"/>
               </a:rPr>
-              <a:t>$3,500.00 / month</a:t>
-            </a:r>
-            <a:endParaRPr lang="en-US" sz="1600" dirty="0"/>
-          </a:p>
-        </p:txBody>
-      </p:sp>
-      <p:sp>
-        <p:nvSpPr>
-          <p:cNvPr id="20" name="Text 17"/>
-          <p:cNvSpPr/>
-          <p:nvPr/>
-        </p:nvSpPr>
-        <p:spPr>
-          <a:xfrm>
-            <a:off x="5577840" y="2377440"/>
-            <a:ext cx="2514600" cy="274320"/>
+              <a:t>Priced per audio-minute</a:t>
+            </a:r>
+            <a:endParaRPr lang="en-US" sz="1200" dirty="0"/>
+          </a:p>
+        </p:txBody>
+      </p:sp>
+      <p:sp>
+        <p:nvSpPr>
+          <p:cNvPr id="11" name="Text 8"/>
+          <p:cNvSpPr/>
+          <p:nvPr/>
+        </p:nvSpPr>
+        <p:spPr>
+          <a:xfrm>
+            <a:off x="5852160" y="2377440"/>
+            <a:ext cx="2240280" cy="457200"/>
           </a:xfrm>
           <a:prstGeom prst="rect">
             <a:avLst/>
@@ -13387,7 +12010,7 @@
                 <a:ea typeface="Arial" pitchFamily="34" charset="-122"/>
                 <a:cs typeface="Arial" pitchFamily="34" charset="-120"/>
               </a:rPr>
-              <a:t>40 hrs/wk only • Misses after-hours • 1 caller at a time</a:t>
+              <a:t>Cost grows with spoken minutes. This is the line that can exceed every other component combined.</a:t>
             </a:r>
             <a:endParaRPr lang="en-US" sz="750" dirty="0"/>
           </a:p>
@@ -13395,18 +12018,18 @@
       </p:sp>
       <p:sp>
         <p:nvSpPr>
-          <p:cNvPr id="21" name="Shape 18"/>
-          <p:cNvSpPr/>
-          <p:nvPr/>
-        </p:nvSpPr>
-        <p:spPr>
-          <a:xfrm>
-            <a:off x="5440680" y="2834640"/>
-            <a:ext cx="2788920" cy="914400"/>
+          <p:cNvPr id="12" name="Shape 9"/>
+          <p:cNvSpPr/>
+          <p:nvPr/>
+        </p:nvSpPr>
+        <p:spPr>
+          <a:xfrm>
+            <a:off x="5715000" y="2971800"/>
+            <a:ext cx="2514600" cy="1051560"/>
           </a:xfrm>
           <a:prstGeom prst="roundRect">
             <a:avLst>
-              <a:gd name="adj" fmla="val 8000"/>
+              <a:gd name="adj" fmla="val 6957"/>
             </a:avLst>
           </a:prstGeom>
           <a:solidFill>
@@ -13422,14 +12045,14 @@
       </p:sp>
       <p:sp>
         <p:nvSpPr>
-          <p:cNvPr id="22" name="Text 19"/>
-          <p:cNvSpPr/>
-          <p:nvPr/>
-        </p:nvSpPr>
-        <p:spPr>
-          <a:xfrm>
-            <a:off x="5577840" y="2898648"/>
-            <a:ext cx="2514600" cy="182880"/>
+          <p:cNvPr id="13" name="Text 10"/>
+          <p:cNvSpPr/>
+          <p:nvPr/>
+        </p:nvSpPr>
+        <p:spPr>
+          <a:xfrm>
+            <a:off x="5852160" y="3063240"/>
+            <a:ext cx="2240280" cy="201168"/>
           </a:xfrm>
           <a:prstGeom prst="rect">
             <a:avLst/>
@@ -13453,7 +12076,7 @@
                 <a:ea typeface="Arial" pitchFamily="34" charset="-122"/>
                 <a:cs typeface="Arial" pitchFamily="34" charset="-120"/>
               </a:rPr>
-              <a:t>BrightSmile AI Solution</a:t>
+              <a:t>Self-Hosted Realtime</a:t>
             </a:r>
             <a:endParaRPr lang="en-US" sz="1000" dirty="0"/>
           </a:p>
@@ -13461,14 +12084,14 @@
       </p:sp>
       <p:sp>
         <p:nvSpPr>
-          <p:cNvPr id="23" name="Text 20"/>
-          <p:cNvSpPr/>
-          <p:nvPr/>
-        </p:nvSpPr>
-        <p:spPr>
-          <a:xfrm>
-            <a:off x="5577840" y="3081528"/>
-            <a:ext cx="2514600" cy="274320"/>
+          <p:cNvPr id="14" name="Text 11"/>
+          <p:cNvSpPr/>
+          <p:nvPr/>
+        </p:nvSpPr>
+        <p:spPr>
+          <a:xfrm>
+            <a:off x="5852160" y="3273552"/>
+            <a:ext cx="2240280" cy="228600"/>
           </a:xfrm>
           <a:prstGeom prst="rect">
             <a:avLst/>
@@ -13484,7 +12107,7 @@
               <a:buNone/>
             </a:pPr>
             <a:r>
-              <a:rPr lang="en-US" sz="1600" b="1" dirty="0">
+              <a:rPr lang="en-US" sz="1200" b="1" dirty="0">
                 <a:solidFill>
                   <a:srgbClr val="15803D"/>
                 </a:solidFill>
@@ -13492,22 +12115,22 @@
                 <a:ea typeface="Arial" pitchFamily="34" charset="-122"/>
                 <a:cs typeface="Arial" pitchFamily="34" charset="-120"/>
               </a:rPr>
-              <a:t>$599.05 / month</a:t>
-            </a:r>
-            <a:endParaRPr lang="en-US" sz="1600" dirty="0"/>
-          </a:p>
-        </p:txBody>
-      </p:sp>
-      <p:sp>
-        <p:nvSpPr>
-          <p:cNvPr id="24" name="Text 21"/>
-          <p:cNvSpPr/>
-          <p:nvPr/>
-        </p:nvSpPr>
-        <p:spPr>
-          <a:xfrm>
-            <a:off x="5577840" y="3383280"/>
-            <a:ext cx="2514600" cy="274320"/>
+              <a:t>Priced per GPU-hour</a:t>
+            </a:r>
+            <a:endParaRPr lang="en-US" sz="1200" dirty="0"/>
+          </a:p>
+        </p:txBody>
+      </p:sp>
+      <p:sp>
+        <p:nvSpPr>
+          <p:cNvPr id="15" name="Text 12"/>
+          <p:cNvSpPr/>
+          <p:nvPr/>
+        </p:nvSpPr>
+        <p:spPr>
+          <a:xfrm>
+            <a:off x="5852160" y="3520440"/>
+            <a:ext cx="2240280" cy="457200"/>
           </a:xfrm>
           <a:prstGeom prst="rect">
             <a:avLst/>
@@ -13531,7 +12154,7 @@
                 <a:ea typeface="Arial" pitchFamily="34" charset="-122"/>
                 <a:cs typeface="Arial" pitchFamily="34" charset="-120"/>
               </a:rPr>
-              <a:t>24/7/365 coverage • Zero hold times • Unlimited concurrent lines</a:t>
+              <a:t>No per-minute bill. Cost is hardware you own plus electricity; capacity is your GPU, not a quota.</a:t>
             </a:r>
             <a:endParaRPr lang="en-US" sz="750" dirty="0"/>
           </a:p>
@@ -13539,18 +12162,18 @@
       </p:sp>
       <p:sp>
         <p:nvSpPr>
-          <p:cNvPr id="25" name="Shape 22"/>
-          <p:cNvSpPr/>
-          <p:nvPr/>
-        </p:nvSpPr>
-        <p:spPr>
-          <a:xfrm>
-            <a:off x="5440680" y="3840480"/>
-            <a:ext cx="2788920" cy="594360"/>
+          <p:cNvPr id="16" name="Shape 13"/>
+          <p:cNvSpPr/>
+          <p:nvPr/>
+        </p:nvSpPr>
+        <p:spPr>
+          <a:xfrm>
+            <a:off x="5715000" y="4114800"/>
+            <a:ext cx="2514600" cy="365760"/>
           </a:xfrm>
           <a:prstGeom prst="roundRect">
             <a:avLst>
-              <a:gd name="adj" fmla="val 12308"/>
+              <a:gd name="adj" fmla="val 20000"/>
             </a:avLst>
           </a:prstGeom>
           <a:solidFill>
@@ -13566,14 +12189,14 @@
       </p:sp>
       <p:sp>
         <p:nvSpPr>
-          <p:cNvPr id="26" name="Text 23"/>
-          <p:cNvSpPr/>
-          <p:nvPr/>
-        </p:nvSpPr>
-        <p:spPr>
-          <a:xfrm>
-            <a:off x="5440680" y="3904488"/>
-            <a:ext cx="2788920" cy="164592"/>
+          <p:cNvPr id="17" name="Text 14"/>
+          <p:cNvSpPr/>
+          <p:nvPr/>
+        </p:nvSpPr>
+        <p:spPr>
+          <a:xfrm>
+            <a:off x="5715000" y="4151376"/>
+            <a:ext cx="2514600" cy="274320"/>
           </a:xfrm>
           <a:prstGeom prst="rect">
             <a:avLst/>
@@ -13589,46 +12212,7 @@
               <a:buNone/>
             </a:pPr>
             <a:r>
-              <a:rPr lang="en-US" sz="750" b="1" dirty="0">
-                <a:solidFill>
-                  <a:srgbClr val="94A3B8"/>
-                </a:solidFill>
-                <a:latin typeface="Arial" pitchFamily="34" charset="0"/>
-                <a:ea typeface="Arial" pitchFamily="34" charset="-122"/>
-                <a:cs typeface="Arial" pitchFamily="34" charset="-120"/>
-              </a:rPr>
-              <a:t>NET ANNUAL CLINIC SAVINGS</a:t>
-            </a:r>
-            <a:endParaRPr lang="en-US" sz="750" dirty="0"/>
-          </a:p>
-        </p:txBody>
-      </p:sp>
-      <p:sp>
-        <p:nvSpPr>
-          <p:cNvPr id="27" name="Text 24"/>
-          <p:cNvSpPr/>
-          <p:nvPr/>
-        </p:nvSpPr>
-        <p:spPr>
-          <a:xfrm>
-            <a:off x="5440680" y="4069080"/>
-            <a:ext cx="2788920" cy="292608"/>
-          </a:xfrm>
-          <a:prstGeom prst="rect">
-            <a:avLst/>
-          </a:prstGeom>
-          <a:noFill/>
-          <a:ln/>
-        </p:spPr>
-        <p:txBody>
-          <a:bodyPr wrap="square" rtlCol="0" anchor="ctr"/>
-          <a:lstStyle/>
-          <a:p>
-            <a:pPr algn="ctr" indent="0" marL="0">
-              <a:buNone/>
-            </a:pPr>
-            <a:r>
-              <a:rPr lang="en-US" sz="1800" b="1" dirty="0">
+              <a:rPr lang="en-US" sz="850" b="1" dirty="0">
                 <a:solidFill>
                   <a:srgbClr val="38BDF8"/>
                 </a:solidFill>
@@ -13636,15 +12220,54 @@
                 <a:ea typeface="Arial" pitchFamily="34" charset="-122"/>
                 <a:cs typeface="Arial" pitchFamily="34" charset="-120"/>
               </a:rPr>
-              <a:t>$34,811 / year</a:t>
-            </a:r>
-            <a:endParaRPr lang="en-US" sz="1800" dirty="0"/>
-          </a:p>
-        </p:txBody>
-      </p:sp>
-      <p:sp>
-        <p:nvSpPr>
-          <p:cNvPr id="28" name="Shape 25"/>
+              <a:t>Same application code either way</a:t>
+            </a:r>
+            <a:endParaRPr lang="en-US" sz="850" dirty="0"/>
+          </a:p>
+        </p:txBody>
+      </p:sp>
+      <p:sp>
+        <p:nvSpPr>
+          <p:cNvPr id="18" name="Text 15"/>
+          <p:cNvSpPr/>
+          <p:nvPr/>
+        </p:nvSpPr>
+        <p:spPr>
+          <a:xfrm>
+            <a:off x="731520" y="4160520"/>
+            <a:ext cx="4572000" cy="502920"/>
+          </a:xfrm>
+          <a:prstGeom prst="rect">
+            <a:avLst/>
+          </a:prstGeom>
+          <a:noFill/>
+          <a:ln/>
+        </p:spPr>
+        <p:txBody>
+          <a:bodyPr wrap="square" rtlCol="0" anchor="t"/>
+          <a:lstStyle/>
+          <a:p>
+            <a:pPr indent="0" marL="0">
+              <a:buNone/>
+            </a:pPr>
+            <a:r>
+              <a:rPr lang="en-US" sz="800" dirty="0">
+                <a:solidFill>
+                  <a:srgbClr val="334155"/>
+                </a:solidFill>
+                <a:latin typeface="Arial" pitchFamily="34" charset="0"/>
+                <a:ea typeface="Arial" pitchFamily="34" charset="-122"/>
+                <a:cs typeface="Arial" pitchFamily="34" charset="-120"/>
+              </a:rPr>
+              <a:t>No single monthly total is quoted: it would require assuming a provider, a minute volume, and a per-minute rate. Those three assumptions set most of the result, and one of them can be zero. Price the deployment against the providers you actually configure.</a:t>
+            </a:r>
+            <a:endParaRPr lang="en-US" sz="800" dirty="0"/>
+          </a:p>
+        </p:txBody>
+      </p:sp>
+      <p:sp>
+        <p:nvSpPr>
+          <p:cNvPr id="19" name="Shape 16"/>
           <p:cNvSpPr/>
           <p:nvPr/>
         </p:nvSpPr>
@@ -13664,7 +12287,7 @@
       </p:sp>
       <p:sp>
         <p:nvSpPr>
-          <p:cNvPr id="29" name="Text 26"/>
+          <p:cNvPr id="20" name="Text 17"/>
           <p:cNvSpPr/>
           <p:nvPr/>
         </p:nvSpPr>
